--- a/CAPSTONE_DELIVERABLES/Snipper_Tool_DaaS_Pitch.pptx
+++ b/CAPSTONE_DELIVERABLES/Snipper_Tool_DaaS_Pitch.pptx
@@ -5,21 +5,17 @@
     <p:sldMasterId id="2147483648" r:id="rId1"/>
   </p:sldMasterIdLst>
   <p:sldIdLst>
-    <p:sldId id="256" r:id="rId7"/>
-    <p:sldId id="257" r:id="rId8"/>
-    <p:sldId id="258" r:id="rId9"/>
-    <p:sldId id="259" r:id="rId10"/>
-    <p:sldId id="260" r:id="rId11"/>
-    <p:sldId id="261" r:id="rId12"/>
-    <p:sldId id="262" r:id="rId13"/>
-    <p:sldId id="263" r:id="rId14"/>
-    <p:sldId id="264" r:id="rId15"/>
-    <p:sldId id="265" r:id="rId16"/>
-    <p:sldId id="266" r:id="rId17"/>
-    <p:sldId id="267" r:id="rId18"/>
-    <p:sldId id="268" r:id="rId19"/>
-    <p:sldId id="269" r:id="rId20"/>
-    <p:sldId id="270" r:id="rId21"/>
+    <p:sldId id="256" r:id="rId2"/>
+    <p:sldId id="257" r:id="rId3"/>
+    <p:sldId id="258" r:id="rId4"/>
+    <p:sldId id="259" r:id="rId5"/>
+    <p:sldId id="260" r:id="rId6"/>
+    <p:sldId id="261" r:id="rId7"/>
+    <p:sldId id="265" r:id="rId8"/>
+    <p:sldId id="266" r:id="rId9"/>
+    <p:sldId id="267" r:id="rId10"/>
+    <p:sldId id="268" r:id="rId11"/>
+    <p:sldId id="270" r:id="rId12"/>
   </p:sldIdLst>
   <p:sldSz cx="9144000" cy="6858000" type="screen4x3"/>
   <p:notesSz cx="6858000" cy="9144000"/>
@@ -118,6 +114,22 @@
       </a:defRPr>
     </a:lvl9pPr>
   </p:defaultTextStyle>
+  <p:extLst>
+    <p:ext uri="{EFAFB233-063F-42B5-8137-9DF3F51BA10A}">
+      <p15:sldGuideLst xmlns:p15="http://schemas.microsoft.com/office/powerpoint/2012/main">
+        <p15:guide id="1" orient="horz" pos="2160">
+          <p15:clr>
+            <a:srgbClr val="A4A3A4"/>
+          </p15:clr>
+        </p15:guide>
+        <p15:guide id="2" pos="2880">
+          <p15:clr>
+            <a:srgbClr val="A4A3A4"/>
+          </p15:clr>
+        </p15:guide>
+      </p15:sldGuideLst>
+    </p:ext>
+  </p:extLst>
 </p:presentation>
 </file>
 
@@ -159,10 +171,9 @@
           <a:lstStyle/>
           <a:p>
             <a:r>
-              <a:rPr lang="en-US" smtClean="0"/>
+              <a:rPr lang="en-US"/>
               <a:t>Click to edit Master title style</a:t>
             </a:r>
-            <a:endParaRPr lang="en-US"/>
           </a:p>
         </p:txBody>
       </p:sp>
@@ -278,10 +289,9 @@
           </a:lstStyle>
           <a:p>
             <a:r>
-              <a:rPr lang="en-US" smtClean="0"/>
+              <a:rPr lang="en-US"/>
               <a:t>Click to edit Master subtitle style</a:t>
             </a:r>
-            <a:endParaRPr lang="en-US"/>
           </a:p>
         </p:txBody>
       </p:sp>
@@ -302,7 +312,7 @@
           <a:p>
             <a:fld id="{5BCAD085-E8A6-8845-BD4E-CB4CCA059FC4}" type="datetimeFigureOut">
               <a:rPr lang="en-US" smtClean="0"/>
-              <a:t>1/27/13</a:t>
+              <a:t>28-Apr-26</a:t>
             </a:fld>
             <a:endParaRPr lang="en-US"/>
           </a:p>
@@ -396,10 +406,9 @@
           <a:lstStyle/>
           <a:p>
             <a:r>
-              <a:rPr lang="en-US" smtClean="0"/>
+              <a:rPr lang="en-US"/>
               <a:t>Click to edit Master title style</a:t>
             </a:r>
-            <a:endParaRPr lang="en-US"/>
           </a:p>
         </p:txBody>
       </p:sp>
@@ -420,38 +429,37 @@
           <a:p>
             <a:pPr lvl="0"/>
             <a:r>
-              <a:rPr lang="en-US" smtClean="0"/>
+              <a:rPr lang="en-US"/>
               <a:t>Click to edit Master text styles</a:t>
             </a:r>
           </a:p>
           <a:p>
             <a:pPr lvl="1"/>
             <a:r>
-              <a:rPr lang="en-US" smtClean="0"/>
+              <a:rPr lang="en-US"/>
               <a:t>Second level</a:t>
             </a:r>
           </a:p>
           <a:p>
             <a:pPr lvl="2"/>
             <a:r>
-              <a:rPr lang="en-US" smtClean="0"/>
+              <a:rPr lang="en-US"/>
               <a:t>Third level</a:t>
             </a:r>
           </a:p>
           <a:p>
             <a:pPr lvl="3"/>
             <a:r>
-              <a:rPr lang="en-US" smtClean="0"/>
+              <a:rPr lang="en-US"/>
               <a:t>Fourth level</a:t>
             </a:r>
           </a:p>
           <a:p>
             <a:pPr lvl="4"/>
             <a:r>
-              <a:rPr lang="en-US" smtClean="0"/>
+              <a:rPr lang="en-US"/>
               <a:t>Fifth level</a:t>
             </a:r>
-            <a:endParaRPr lang="en-US"/>
           </a:p>
         </p:txBody>
       </p:sp>
@@ -472,7 +480,7 @@
           <a:p>
             <a:fld id="{5BCAD085-E8A6-8845-BD4E-CB4CCA059FC4}" type="datetimeFigureOut">
               <a:rPr lang="en-US" smtClean="0"/>
-              <a:t>1/27/13</a:t>
+              <a:t>28-Apr-26</a:t>
             </a:fld>
             <a:endParaRPr lang="en-US"/>
           </a:p>
@@ -571,10 +579,9 @@
           <a:lstStyle/>
           <a:p>
             <a:r>
-              <a:rPr lang="en-US" smtClean="0"/>
+              <a:rPr lang="en-US"/>
               <a:t>Click to edit Master title style</a:t>
             </a:r>
-            <a:endParaRPr lang="en-US"/>
           </a:p>
         </p:txBody>
       </p:sp>
@@ -600,38 +607,37 @@
           <a:p>
             <a:pPr lvl="0"/>
             <a:r>
-              <a:rPr lang="en-US" smtClean="0"/>
+              <a:rPr lang="en-US"/>
               <a:t>Click to edit Master text styles</a:t>
             </a:r>
           </a:p>
           <a:p>
             <a:pPr lvl="1"/>
             <a:r>
-              <a:rPr lang="en-US" smtClean="0"/>
+              <a:rPr lang="en-US"/>
               <a:t>Second level</a:t>
             </a:r>
           </a:p>
           <a:p>
             <a:pPr lvl="2"/>
             <a:r>
-              <a:rPr lang="en-US" smtClean="0"/>
+              <a:rPr lang="en-US"/>
               <a:t>Third level</a:t>
             </a:r>
           </a:p>
           <a:p>
             <a:pPr lvl="3"/>
             <a:r>
-              <a:rPr lang="en-US" smtClean="0"/>
+              <a:rPr lang="en-US"/>
               <a:t>Fourth level</a:t>
             </a:r>
           </a:p>
           <a:p>
             <a:pPr lvl="4"/>
             <a:r>
-              <a:rPr lang="en-US" smtClean="0"/>
+              <a:rPr lang="en-US"/>
               <a:t>Fifth level</a:t>
             </a:r>
-            <a:endParaRPr lang="en-US"/>
           </a:p>
         </p:txBody>
       </p:sp>
@@ -652,7 +658,7 @@
           <a:p>
             <a:fld id="{5BCAD085-E8A6-8845-BD4E-CB4CCA059FC4}" type="datetimeFigureOut">
               <a:rPr lang="en-US" smtClean="0"/>
-              <a:t>1/27/13</a:t>
+              <a:t>28-Apr-26</a:t>
             </a:fld>
             <a:endParaRPr lang="en-US"/>
           </a:p>
@@ -746,10 +752,9 @@
           <a:lstStyle/>
           <a:p>
             <a:r>
-              <a:rPr lang="en-US" smtClean="0"/>
+              <a:rPr lang="en-US"/>
               <a:t>Click to edit Master title style</a:t>
             </a:r>
-            <a:endParaRPr lang="en-US"/>
           </a:p>
         </p:txBody>
       </p:sp>
@@ -770,38 +775,37 @@
           <a:p>
             <a:pPr lvl="0"/>
             <a:r>
-              <a:rPr lang="en-US" smtClean="0"/>
+              <a:rPr lang="en-US"/>
               <a:t>Click to edit Master text styles</a:t>
             </a:r>
           </a:p>
           <a:p>
             <a:pPr lvl="1"/>
             <a:r>
-              <a:rPr lang="en-US" smtClean="0"/>
+              <a:rPr lang="en-US"/>
               <a:t>Second level</a:t>
             </a:r>
           </a:p>
           <a:p>
             <a:pPr lvl="2"/>
             <a:r>
-              <a:rPr lang="en-US" smtClean="0"/>
+              <a:rPr lang="en-US"/>
               <a:t>Third level</a:t>
             </a:r>
           </a:p>
           <a:p>
             <a:pPr lvl="3"/>
             <a:r>
-              <a:rPr lang="en-US" smtClean="0"/>
+              <a:rPr lang="en-US"/>
               <a:t>Fourth level</a:t>
             </a:r>
           </a:p>
           <a:p>
             <a:pPr lvl="4"/>
             <a:r>
-              <a:rPr lang="en-US" smtClean="0"/>
+              <a:rPr lang="en-US"/>
               <a:t>Fifth level</a:t>
             </a:r>
-            <a:endParaRPr lang="en-US"/>
           </a:p>
         </p:txBody>
       </p:sp>
@@ -822,7 +826,7 @@
           <a:p>
             <a:fld id="{5BCAD085-E8A6-8845-BD4E-CB4CCA059FC4}" type="datetimeFigureOut">
               <a:rPr lang="en-US" smtClean="0"/>
-              <a:t>1/27/13</a:t>
+              <a:t>28-Apr-26</a:t>
             </a:fld>
             <a:endParaRPr lang="en-US"/>
           </a:p>
@@ -925,10 +929,9 @@
           </a:lstStyle>
           <a:p>
             <a:r>
-              <a:rPr lang="en-US" smtClean="0"/>
+              <a:rPr lang="en-US"/>
               <a:t>Click to edit Master title style</a:t>
             </a:r>
-            <a:endParaRPr lang="en-US"/>
           </a:p>
         </p:txBody>
       </p:sp>
@@ -1045,7 +1048,7 @@
           <a:p>
             <a:pPr lvl="0"/>
             <a:r>
-              <a:rPr lang="en-US" smtClean="0"/>
+              <a:rPr lang="en-US"/>
               <a:t>Click to edit Master text styles</a:t>
             </a:r>
           </a:p>
@@ -1068,7 +1071,7 @@
           <a:p>
             <a:fld id="{5BCAD085-E8A6-8845-BD4E-CB4CCA059FC4}" type="datetimeFigureOut">
               <a:rPr lang="en-US" smtClean="0"/>
-              <a:t>1/27/13</a:t>
+              <a:t>28-Apr-26</a:t>
             </a:fld>
             <a:endParaRPr lang="en-US"/>
           </a:p>
@@ -1162,10 +1165,9 @@
           <a:lstStyle/>
           <a:p>
             <a:r>
-              <a:rPr lang="en-US" smtClean="0"/>
+              <a:rPr lang="en-US"/>
               <a:t>Click to edit Master title style</a:t>
             </a:r>
-            <a:endParaRPr lang="en-US"/>
           </a:p>
         </p:txBody>
       </p:sp>
@@ -1219,38 +1221,37 @@
           <a:p>
             <a:pPr lvl="0"/>
             <a:r>
-              <a:rPr lang="en-US" smtClean="0"/>
+              <a:rPr lang="en-US"/>
               <a:t>Click to edit Master text styles</a:t>
             </a:r>
           </a:p>
           <a:p>
             <a:pPr lvl="1"/>
             <a:r>
-              <a:rPr lang="en-US" smtClean="0"/>
+              <a:rPr lang="en-US"/>
               <a:t>Second level</a:t>
             </a:r>
           </a:p>
           <a:p>
             <a:pPr lvl="2"/>
             <a:r>
-              <a:rPr lang="en-US" smtClean="0"/>
+              <a:rPr lang="en-US"/>
               <a:t>Third level</a:t>
             </a:r>
           </a:p>
           <a:p>
             <a:pPr lvl="3"/>
             <a:r>
-              <a:rPr lang="en-US" smtClean="0"/>
+              <a:rPr lang="en-US"/>
               <a:t>Fourth level</a:t>
             </a:r>
           </a:p>
           <a:p>
             <a:pPr lvl="4"/>
             <a:r>
-              <a:rPr lang="en-US" smtClean="0"/>
+              <a:rPr lang="en-US"/>
               <a:t>Fifth level</a:t>
             </a:r>
-            <a:endParaRPr lang="en-US"/>
           </a:p>
         </p:txBody>
       </p:sp>
@@ -1304,38 +1305,37 @@
           <a:p>
             <a:pPr lvl="0"/>
             <a:r>
-              <a:rPr lang="en-US" smtClean="0"/>
+              <a:rPr lang="en-US"/>
               <a:t>Click to edit Master text styles</a:t>
             </a:r>
           </a:p>
           <a:p>
             <a:pPr lvl="1"/>
             <a:r>
-              <a:rPr lang="en-US" smtClean="0"/>
+              <a:rPr lang="en-US"/>
               <a:t>Second level</a:t>
             </a:r>
           </a:p>
           <a:p>
             <a:pPr lvl="2"/>
             <a:r>
-              <a:rPr lang="en-US" smtClean="0"/>
+              <a:rPr lang="en-US"/>
               <a:t>Third level</a:t>
             </a:r>
           </a:p>
           <a:p>
             <a:pPr lvl="3"/>
             <a:r>
-              <a:rPr lang="en-US" smtClean="0"/>
+              <a:rPr lang="en-US"/>
               <a:t>Fourth level</a:t>
             </a:r>
           </a:p>
           <a:p>
             <a:pPr lvl="4"/>
             <a:r>
-              <a:rPr lang="en-US" smtClean="0"/>
+              <a:rPr lang="en-US"/>
               <a:t>Fifth level</a:t>
             </a:r>
-            <a:endParaRPr lang="en-US"/>
           </a:p>
         </p:txBody>
       </p:sp>
@@ -1356,7 +1356,7 @@
           <a:p>
             <a:fld id="{5BCAD085-E8A6-8845-BD4E-CB4CCA059FC4}" type="datetimeFigureOut">
               <a:rPr lang="en-US" smtClean="0"/>
-              <a:t>1/27/13</a:t>
+              <a:t>28-Apr-26</a:t>
             </a:fld>
             <a:endParaRPr lang="en-US"/>
           </a:p>
@@ -1454,10 +1454,9 @@
           </a:lstStyle>
           <a:p>
             <a:r>
-              <a:rPr lang="en-US" smtClean="0"/>
+              <a:rPr lang="en-US"/>
               <a:t>Click to edit Master title style</a:t>
             </a:r>
-            <a:endParaRPr lang="en-US"/>
           </a:p>
         </p:txBody>
       </p:sp>
@@ -1520,7 +1519,7 @@
           <a:p>
             <a:pPr lvl="0"/>
             <a:r>
-              <a:rPr lang="en-US" smtClean="0"/>
+              <a:rPr lang="en-US"/>
               <a:t>Click to edit Master text styles</a:t>
             </a:r>
           </a:p>
@@ -1576,38 +1575,37 @@
           <a:p>
             <a:pPr lvl="0"/>
             <a:r>
-              <a:rPr lang="en-US" smtClean="0"/>
+              <a:rPr lang="en-US"/>
               <a:t>Click to edit Master text styles</a:t>
             </a:r>
           </a:p>
           <a:p>
             <a:pPr lvl="1"/>
             <a:r>
-              <a:rPr lang="en-US" smtClean="0"/>
+              <a:rPr lang="en-US"/>
               <a:t>Second level</a:t>
             </a:r>
           </a:p>
           <a:p>
             <a:pPr lvl="2"/>
             <a:r>
-              <a:rPr lang="en-US" smtClean="0"/>
+              <a:rPr lang="en-US"/>
               <a:t>Third level</a:t>
             </a:r>
           </a:p>
           <a:p>
             <a:pPr lvl="3"/>
             <a:r>
-              <a:rPr lang="en-US" smtClean="0"/>
+              <a:rPr lang="en-US"/>
               <a:t>Fourth level</a:t>
             </a:r>
           </a:p>
           <a:p>
             <a:pPr lvl="4"/>
             <a:r>
-              <a:rPr lang="en-US" smtClean="0"/>
+              <a:rPr lang="en-US"/>
               <a:t>Fifth level</a:t>
             </a:r>
-            <a:endParaRPr lang="en-US"/>
           </a:p>
         </p:txBody>
       </p:sp>
@@ -1670,7 +1668,7 @@
           <a:p>
             <a:pPr lvl="0"/>
             <a:r>
-              <a:rPr lang="en-US" smtClean="0"/>
+              <a:rPr lang="en-US"/>
               <a:t>Click to edit Master text styles</a:t>
             </a:r>
           </a:p>
@@ -1726,38 +1724,37 @@
           <a:p>
             <a:pPr lvl="0"/>
             <a:r>
-              <a:rPr lang="en-US" smtClean="0"/>
+              <a:rPr lang="en-US"/>
               <a:t>Click to edit Master text styles</a:t>
             </a:r>
           </a:p>
           <a:p>
             <a:pPr lvl="1"/>
             <a:r>
-              <a:rPr lang="en-US" smtClean="0"/>
+              <a:rPr lang="en-US"/>
               <a:t>Second level</a:t>
             </a:r>
           </a:p>
           <a:p>
             <a:pPr lvl="2"/>
             <a:r>
-              <a:rPr lang="en-US" smtClean="0"/>
+              <a:rPr lang="en-US"/>
               <a:t>Third level</a:t>
             </a:r>
           </a:p>
           <a:p>
             <a:pPr lvl="3"/>
             <a:r>
-              <a:rPr lang="en-US" smtClean="0"/>
+              <a:rPr lang="en-US"/>
               <a:t>Fourth level</a:t>
             </a:r>
           </a:p>
           <a:p>
             <a:pPr lvl="4"/>
             <a:r>
-              <a:rPr lang="en-US" smtClean="0"/>
+              <a:rPr lang="en-US"/>
               <a:t>Fifth level</a:t>
             </a:r>
-            <a:endParaRPr lang="en-US"/>
           </a:p>
         </p:txBody>
       </p:sp>
@@ -1778,7 +1775,7 @@
           <a:p>
             <a:fld id="{5BCAD085-E8A6-8845-BD4E-CB4CCA059FC4}" type="datetimeFigureOut">
               <a:rPr lang="en-US" smtClean="0"/>
-              <a:t>1/27/13</a:t>
+              <a:t>28-Apr-26</a:t>
             </a:fld>
             <a:endParaRPr lang="en-US"/>
           </a:p>
@@ -1872,10 +1869,9 @@
           <a:lstStyle/>
           <a:p>
             <a:r>
-              <a:rPr lang="en-US" smtClean="0"/>
+              <a:rPr lang="en-US"/>
               <a:t>Click to edit Master title style</a:t>
             </a:r>
-            <a:endParaRPr lang="en-US"/>
           </a:p>
         </p:txBody>
       </p:sp>
@@ -1896,7 +1892,7 @@
           <a:p>
             <a:fld id="{5BCAD085-E8A6-8845-BD4E-CB4CCA059FC4}" type="datetimeFigureOut">
               <a:rPr lang="en-US" smtClean="0"/>
-              <a:t>1/27/13</a:t>
+              <a:t>28-Apr-26</a:t>
             </a:fld>
             <a:endParaRPr lang="en-US"/>
           </a:p>
@@ -1991,7 +1987,7 @@
           <a:p>
             <a:fld id="{5BCAD085-E8A6-8845-BD4E-CB4CCA059FC4}" type="datetimeFigureOut">
               <a:rPr lang="en-US" smtClean="0"/>
-              <a:t>1/27/13</a:t>
+              <a:t>28-Apr-26</a:t>
             </a:fld>
             <a:endParaRPr lang="en-US"/>
           </a:p>
@@ -2094,10 +2090,9 @@
           </a:lstStyle>
           <a:p>
             <a:r>
-              <a:rPr lang="en-US" smtClean="0"/>
+              <a:rPr lang="en-US"/>
               <a:t>Click to edit Master title style</a:t>
             </a:r>
-            <a:endParaRPr lang="en-US"/>
           </a:p>
         </p:txBody>
       </p:sp>
@@ -2151,38 +2146,37 @@
           <a:p>
             <a:pPr lvl="0"/>
             <a:r>
-              <a:rPr lang="en-US" smtClean="0"/>
+              <a:rPr lang="en-US"/>
               <a:t>Click to edit Master text styles</a:t>
             </a:r>
           </a:p>
           <a:p>
             <a:pPr lvl="1"/>
             <a:r>
-              <a:rPr lang="en-US" smtClean="0"/>
+              <a:rPr lang="en-US"/>
               <a:t>Second level</a:t>
             </a:r>
           </a:p>
           <a:p>
             <a:pPr lvl="2"/>
             <a:r>
-              <a:rPr lang="en-US" smtClean="0"/>
+              <a:rPr lang="en-US"/>
               <a:t>Third level</a:t>
             </a:r>
           </a:p>
           <a:p>
             <a:pPr lvl="3"/>
             <a:r>
-              <a:rPr lang="en-US" smtClean="0"/>
+              <a:rPr lang="en-US"/>
               <a:t>Fourth level</a:t>
             </a:r>
           </a:p>
           <a:p>
             <a:pPr lvl="4"/>
             <a:r>
-              <a:rPr lang="en-US" smtClean="0"/>
+              <a:rPr lang="en-US"/>
               <a:t>Fifth level</a:t>
             </a:r>
-            <a:endParaRPr lang="en-US"/>
           </a:p>
         </p:txBody>
       </p:sp>
@@ -2245,7 +2239,7 @@
           <a:p>
             <a:pPr lvl="0"/>
             <a:r>
-              <a:rPr lang="en-US" smtClean="0"/>
+              <a:rPr lang="en-US"/>
               <a:t>Click to edit Master text styles</a:t>
             </a:r>
           </a:p>
@@ -2268,7 +2262,7 @@
           <a:p>
             <a:fld id="{5BCAD085-E8A6-8845-BD4E-CB4CCA059FC4}" type="datetimeFigureOut">
               <a:rPr lang="en-US" smtClean="0"/>
-              <a:t>1/27/13</a:t>
+              <a:t>28-Apr-26</a:t>
             </a:fld>
             <a:endParaRPr lang="en-US"/>
           </a:p>
@@ -2371,10 +2365,9 @@
           </a:lstStyle>
           <a:p>
             <a:r>
-              <a:rPr lang="en-US" smtClean="0"/>
+              <a:rPr lang="en-US"/>
               <a:t>Click to edit Master title style</a:t>
             </a:r>
-            <a:endParaRPr lang="en-US"/>
           </a:p>
         </p:txBody>
       </p:sp>
@@ -2498,7 +2491,7 @@
           <a:p>
             <a:pPr lvl="0"/>
             <a:r>
-              <a:rPr lang="en-US" smtClean="0"/>
+              <a:rPr lang="en-US"/>
               <a:t>Click to edit Master text styles</a:t>
             </a:r>
           </a:p>
@@ -2521,7 +2514,7 @@
           <a:p>
             <a:fld id="{5BCAD085-E8A6-8845-BD4E-CB4CCA059FC4}" type="datetimeFigureOut">
               <a:rPr lang="en-US" smtClean="0"/>
-              <a:t>1/27/13</a:t>
+              <a:t>28-Apr-26</a:t>
             </a:fld>
             <a:endParaRPr lang="en-US"/>
           </a:p>
@@ -2630,10 +2623,9 @@
           <a:lstStyle/>
           <a:p>
             <a:r>
-              <a:rPr lang="en-US" smtClean="0"/>
+              <a:rPr lang="en-US"/>
               <a:t>Click to edit Master title style</a:t>
             </a:r>
-            <a:endParaRPr lang="en-US"/>
           </a:p>
         </p:txBody>
       </p:sp>
@@ -2664,38 +2656,37 @@
           <a:p>
             <a:pPr lvl="0"/>
             <a:r>
-              <a:rPr lang="en-US" smtClean="0"/>
+              <a:rPr lang="en-US"/>
               <a:t>Click to edit Master text styles</a:t>
             </a:r>
           </a:p>
           <a:p>
             <a:pPr lvl="1"/>
             <a:r>
-              <a:rPr lang="en-US" smtClean="0"/>
+              <a:rPr lang="en-US"/>
               <a:t>Second level</a:t>
             </a:r>
           </a:p>
           <a:p>
             <a:pPr lvl="2"/>
             <a:r>
-              <a:rPr lang="en-US" smtClean="0"/>
+              <a:rPr lang="en-US"/>
               <a:t>Third level</a:t>
             </a:r>
           </a:p>
           <a:p>
             <a:pPr lvl="3"/>
             <a:r>
-              <a:rPr lang="en-US" smtClean="0"/>
+              <a:rPr lang="en-US"/>
               <a:t>Fourth level</a:t>
             </a:r>
           </a:p>
           <a:p>
             <a:pPr lvl="4"/>
             <a:r>
-              <a:rPr lang="en-US" smtClean="0"/>
+              <a:rPr lang="en-US"/>
               <a:t>Fifth level</a:t>
             </a:r>
-            <a:endParaRPr lang="en-US"/>
           </a:p>
         </p:txBody>
       </p:sp>
@@ -2734,7 +2725,7 @@
           <a:p>
             <a:fld id="{5BCAD085-E8A6-8845-BD4E-CB4CCA059FC4}" type="datetimeFigureOut">
               <a:rPr lang="en-US" smtClean="0"/>
-              <a:t>1/27/13</a:t>
+              <a:t>28-Apr-26</a:t>
             </a:fld>
             <a:endParaRPr lang="en-US"/>
           </a:p>
@@ -3093,7 +3084,7 @@
 </file>
 
 <file path=ppt/slides/slide1.xml><?xml version="1.0" encoding="utf-8"?>
-<p:sld xmlns:a="http://schemas.openxmlformats.org/drawingml/2006/main" xmlns:p="http://schemas.openxmlformats.org/presentationml/2006/main" xmlns:r="http://schemas.openxmlformats.org/officeDocument/2006/relationships">
+<p:sld xmlns:a="http://schemas.openxmlformats.org/drawingml/2006/main" xmlns:r="http://schemas.openxmlformats.org/officeDocument/2006/relationships" xmlns:p="http://schemas.openxmlformats.org/presentationml/2006/main">
   <p:cSld>
     <p:bg>
       <p:bgPr>
@@ -3109,7 +3100,14 @@
         <p:cNvGrpSpPr/>
         <p:nvPr/>
       </p:nvGrpSpPr>
-      <p:grpSpPr/>
+      <p:grpSpPr>
+        <a:xfrm>
+          <a:off x="0" y="0"/>
+          <a:ext cx="0" cy="0"/>
+          <a:chOff x="0" y="0"/>
+          <a:chExt cx="0" cy="0"/>
+        </a:xfrm>
+      </p:grpSpPr>
       <p:sp>
         <p:nvSpPr>
           <p:cNvPr id="2" name="TextBox 1"/>
@@ -3193,7 +3191,7 @@
 </file>
 
 <file path=ppt/slides/slide10.xml><?xml version="1.0" encoding="utf-8"?>
-<p:sld xmlns:a="http://schemas.openxmlformats.org/drawingml/2006/main" xmlns:p="http://schemas.openxmlformats.org/presentationml/2006/main" xmlns:r="http://schemas.openxmlformats.org/officeDocument/2006/relationships">
+<p:sld xmlns:a="http://schemas.openxmlformats.org/drawingml/2006/main" xmlns:r="http://schemas.openxmlformats.org/officeDocument/2006/relationships" xmlns:p="http://schemas.openxmlformats.org/presentationml/2006/main">
   <p:cSld>
     <p:bg>
       <p:bgPr>
@@ -3209,7 +3207,14 @@
         <p:cNvGrpSpPr/>
         <p:nvPr/>
       </p:nvGrpSpPr>
-      <p:grpSpPr/>
+      <p:grpSpPr>
+        <a:xfrm>
+          <a:off x="0" y="0"/>
+          <a:ext cx="0" cy="0"/>
+          <a:chOff x="0" y="0"/>
+          <a:chExt cx="0" cy="0"/>
+        </a:xfrm>
+      </p:grpSpPr>
       <p:sp>
         <p:nvSpPr>
           <p:cNvPr id="2" name="Rectangle 1"/>
@@ -3265,7 +3270,7 @@
               </a:defRPr>
             </a:pPr>
             <a:r>
-              <a:t>The Scalability Advantage</a:t>
+              <a:t>5-Year Financial Projections</a:t>
             </a:r>
           </a:p>
         </p:txBody>
@@ -3278,8 +3283,8 @@
         </p:nvSpPr>
         <p:spPr>
           <a:xfrm>
-            <a:off x="731520" y="1097280"/>
-            <a:ext cx="7680960" cy="5303520"/>
+            <a:off x="630936" y="758952"/>
+            <a:ext cx="7680960" cy="5170646"/>
           </a:xfrm>
           <a:prstGeom prst="rect">
             <a:avLst/>
@@ -3294,10 +3299,10 @@
           <a:p>
             <a:pPr>
               <a:spcBef>
-                <a:spcPts val="800"/>
-              </a:spcBef>
-              <a:spcAft>
-                <a:spcPts val="800"/>
+                <a:spcPts val="600"/>
+              </a:spcBef>
+              <a:spcAft>
+                <a:spcPts val="600"/>
               </a:spcAft>
               <a:defRPr sz="2400">
                 <a:solidFill>
@@ -3306,16 +3311,39 @@
               </a:defRPr>
             </a:pPr>
             <a:r>
-              <a:t>REUSABLE CORE: Screenshot overlay + OCR + metadata works across ALL industries</a:t>
+              <a:rPr sz="2400" dirty="0"/>
+              <a:t>Year 1: </a:t>
+            </a:r>
+            <a:endParaRPr lang="en-US" sz="2400" dirty="0"/>
+          </a:p>
+          <a:p>
+            <a:pPr marL="342900" indent="-342900">
+              <a:spcBef>
+                <a:spcPts val="600"/>
+              </a:spcBef>
+              <a:spcAft>
+                <a:spcPts val="600"/>
+              </a:spcAft>
+              <a:buFont typeface="Arial" panose="020B0604020202020204" pitchFamily="34" charset="0"/>
+              <a:buChar char="•"/>
+              <a:defRPr sz="2400">
+                <a:solidFill>
+                  <a:srgbClr val="333333"/>
+                </a:solidFill>
+              </a:defRPr>
+            </a:pPr>
+            <a:r>
+              <a:rPr sz="2400" dirty="0"/>
+              <a:t>€275K revenue | €175K profit (64% margin)</a:t>
             </a:r>
           </a:p>
           <a:p>
             <a:pPr>
               <a:spcBef>
-                <a:spcPts val="800"/>
-              </a:spcBef>
-              <a:spcAft>
-                <a:spcPts val="800"/>
+                <a:spcPts val="600"/>
+              </a:spcBef>
+              <a:spcAft>
+                <a:spcPts val="600"/>
               </a:spcAft>
               <a:defRPr sz="2400">
                 <a:solidFill>
@@ -3324,16 +3352,39 @@
               </a:defRPr>
             </a:pPr>
             <a:r>
-              <a:t>FASTER EXPANSION: Each new vertical takes 4-6 weeks (30-40% code changes)</a:t>
+              <a:rPr sz="2400" dirty="0"/>
+              <a:t>Year 2: </a:t>
+            </a:r>
+            <a:endParaRPr lang="en-US" sz="2400" dirty="0"/>
+          </a:p>
+          <a:p>
+            <a:pPr marL="342900" indent="-342900">
+              <a:spcBef>
+                <a:spcPts val="600"/>
+              </a:spcBef>
+              <a:spcAft>
+                <a:spcPts val="600"/>
+              </a:spcAft>
+              <a:buFont typeface="Arial" panose="020B0604020202020204" pitchFamily="34" charset="0"/>
+              <a:buChar char="•"/>
+              <a:defRPr sz="2400">
+                <a:solidFill>
+                  <a:srgbClr val="333333"/>
+                </a:solidFill>
+              </a:defRPr>
+            </a:pPr>
+            <a:r>
+              <a:rPr sz="2400" dirty="0"/>
+              <a:t>€850K revenue | €600K profit (71% margin)</a:t>
             </a:r>
           </a:p>
           <a:p>
             <a:pPr>
               <a:spcBef>
-                <a:spcPts val="800"/>
-              </a:spcBef>
-              <a:spcAft>
-                <a:spcPts val="800"/>
+                <a:spcPts val="600"/>
+              </a:spcBef>
+              <a:spcAft>
+                <a:spcPts val="600"/>
               </a:spcAft>
               <a:defRPr sz="2400">
                 <a:solidFill>
@@ -3342,16 +3393,39 @@
               </a:defRPr>
             </a:pPr>
             <a:r>
-              <a:t>MARGINAL COSTS: Infrastructure scales logarithmically, not linearly</a:t>
+              <a:rPr sz="2400" dirty="0"/>
+              <a:t>Year 3: </a:t>
+            </a:r>
+            <a:endParaRPr lang="en-US" sz="2400" dirty="0"/>
+          </a:p>
+          <a:p>
+            <a:pPr marL="342900" indent="-342900">
+              <a:spcBef>
+                <a:spcPts val="600"/>
+              </a:spcBef>
+              <a:spcAft>
+                <a:spcPts val="600"/>
+              </a:spcAft>
+              <a:buFont typeface="Arial" panose="020B0604020202020204" pitchFamily="34" charset="0"/>
+              <a:buChar char="•"/>
+              <a:defRPr sz="2400">
+                <a:solidFill>
+                  <a:srgbClr val="333333"/>
+                </a:solidFill>
+              </a:defRPr>
+            </a:pPr>
+            <a:r>
+              <a:rPr sz="2400" dirty="0"/>
+              <a:t>€2.1M revenue | €1.65M profit (79% margin)</a:t>
             </a:r>
           </a:p>
           <a:p>
             <a:pPr>
               <a:spcBef>
-                <a:spcPts val="800"/>
-              </a:spcBef>
-              <a:spcAft>
-                <a:spcPts val="800"/>
+                <a:spcPts val="600"/>
+              </a:spcBef>
+              <a:spcAft>
+                <a:spcPts val="600"/>
               </a:spcAft>
               <a:defRPr sz="2400">
                 <a:solidFill>
@@ -3359,14 +3433,40 @@
                 </a:solidFill>
               </a:defRPr>
             </a:pPr>
+            <a:r>
+              <a:rPr sz="2400" dirty="0"/>
+              <a:t>Year 4: </a:t>
+            </a:r>
+            <a:endParaRPr lang="en-US" sz="2400" dirty="0"/>
+          </a:p>
+          <a:p>
+            <a:pPr marL="342900" indent="-342900">
+              <a:spcBef>
+                <a:spcPts val="600"/>
+              </a:spcBef>
+              <a:spcAft>
+                <a:spcPts val="600"/>
+              </a:spcAft>
+              <a:buFont typeface="Arial" panose="020B0604020202020204" pitchFamily="34" charset="0"/>
+              <a:buChar char="•"/>
+              <a:defRPr sz="2400">
+                <a:solidFill>
+                  <a:srgbClr val="333333"/>
+                </a:solidFill>
+              </a:defRPr>
+            </a:pPr>
+            <a:r>
+              <a:rPr sz="2400" dirty="0"/>
+              <a:t>€4M revenue | €3.3M profit (83% margin)</a:t>
+            </a:r>
           </a:p>
           <a:p>
             <a:pPr>
               <a:spcBef>
-                <a:spcPts val="800"/>
-              </a:spcBef>
-              <a:spcAft>
-                <a:spcPts val="800"/>
+                <a:spcPts val="600"/>
+              </a:spcBef>
+              <a:spcAft>
+                <a:spcPts val="600"/>
               </a:spcAft>
               <a:defRPr sz="2400">
                 <a:solidFill>
@@ -3375,17 +3475,21 @@
               </a:defRPr>
             </a:pPr>
             <a:r>
-              <a:t>Year 1 Revenue Path:</a:t>
-            </a:r>
-          </a:p>
-          <a:p>
-            <a:pPr>
-              <a:spcBef>
-                <a:spcPts val="800"/>
-              </a:spcBef>
-              <a:spcAft>
-                <a:spcPts val="800"/>
-              </a:spcAft>
+              <a:rPr sz="2400" dirty="0"/>
+              <a:t>Year 5: </a:t>
+            </a:r>
+            <a:endParaRPr lang="en-US" sz="2400" dirty="0"/>
+          </a:p>
+          <a:p>
+            <a:pPr marL="342900" indent="-342900">
+              <a:spcBef>
+                <a:spcPts val="600"/>
+              </a:spcBef>
+              <a:spcAft>
+                <a:spcPts val="600"/>
+              </a:spcAft>
+              <a:buFont typeface="Arial" panose="020B0604020202020204" pitchFamily="34" charset="0"/>
+              <a:buChar char="•"/>
               <a:defRPr sz="2400">
                 <a:solidFill>
                   <a:srgbClr val="333333"/>
@@ -3393,7 +3497,8 @@
               </a:defRPr>
             </a:pPr>
             <a:r>
-              <a:t>  Q1-Q2: Retail (€150K) | Q3: Real Estate (€250K) | Q4: Auto (€400K) | Year 2: €1-2M</a:t>
+              <a:rPr sz="2400" dirty="0"/>
+              <a:t>€8M+ revenue | 85%+ margin (data licensing focus)</a:t>
             </a:r>
           </a:p>
         </p:txBody>
@@ -3407,7 +3512,76 @@
 </file>
 
 <file path=ppt/slides/slide11.xml><?xml version="1.0" encoding="utf-8"?>
-<p:sld xmlns:a="http://schemas.openxmlformats.org/drawingml/2006/main" xmlns:p="http://schemas.openxmlformats.org/presentationml/2006/main" xmlns:r="http://schemas.openxmlformats.org/officeDocument/2006/relationships">
+<p:sld xmlns:a="http://schemas.openxmlformats.org/drawingml/2006/main" xmlns:r="http://schemas.openxmlformats.org/officeDocument/2006/relationships" xmlns:p="http://schemas.openxmlformats.org/presentationml/2006/main">
+  <p:cSld>
+    <p:bg>
+      <p:bgPr>
+        <a:solidFill>
+          <a:srgbClr val="1F4E79"/>
+        </a:solidFill>
+        <a:effectLst/>
+      </p:bgPr>
+    </p:bg>
+    <p:spTree>
+      <p:nvGrpSpPr>
+        <p:cNvPr id="1" name=""/>
+        <p:cNvGrpSpPr/>
+        <p:nvPr/>
+      </p:nvGrpSpPr>
+      <p:grpSpPr>
+        <a:xfrm>
+          <a:off x="0" y="0"/>
+          <a:ext cx="0" cy="0"/>
+          <a:chOff x="0" y="0"/>
+          <a:chExt cx="0" cy="0"/>
+        </a:xfrm>
+      </p:grpSpPr>
+      <p:sp>
+        <p:nvSpPr>
+          <p:cNvPr id="2" name="TextBox 1"/>
+          <p:cNvSpPr txBox="1"/>
+          <p:nvPr/>
+        </p:nvSpPr>
+        <p:spPr>
+          <a:xfrm>
+            <a:off x="676656" y="1014984"/>
+            <a:ext cx="8229600" cy="1371600"/>
+          </a:xfrm>
+          <a:prstGeom prst="rect">
+            <a:avLst/>
+          </a:prstGeom>
+          <a:noFill/>
+        </p:spPr>
+        <p:txBody>
+          <a:bodyPr wrap="square">
+            <a:spAutoFit/>
+          </a:bodyPr>
+          <a:lstStyle/>
+          <a:p>
+            <a:pPr algn="ctr">
+              <a:defRPr sz="6600" b="1">
+                <a:solidFill>
+                  <a:srgbClr val="FFFFFF"/>
+                </a:solidFill>
+              </a:defRPr>
+            </a:pPr>
+            <a:r>
+              <a:rPr dirty="0"/>
+              <a:t>Transform Data Collection into Revenue</a:t>
+            </a:r>
+          </a:p>
+        </p:txBody>
+      </p:sp>
+    </p:spTree>
+  </p:cSld>
+  <p:clrMapOvr>
+    <a:masterClrMapping/>
+  </p:clrMapOvr>
+</p:sld>
+</file>
+
+<file path=ppt/slides/slide2.xml><?xml version="1.0" encoding="utf-8"?>
+<p:sld xmlns:a="http://schemas.openxmlformats.org/drawingml/2006/main" xmlns:r="http://schemas.openxmlformats.org/officeDocument/2006/relationships" xmlns:p="http://schemas.openxmlformats.org/presentationml/2006/main">
   <p:cSld>
     <p:bg>
       <p:bgPr>
@@ -3423,7 +3597,14 @@
         <p:cNvGrpSpPr/>
         <p:nvPr/>
       </p:nvGrpSpPr>
-      <p:grpSpPr/>
+      <p:grpSpPr>
+        <a:xfrm>
+          <a:off x="0" y="0"/>
+          <a:ext cx="0" cy="0"/>
+          <a:chOff x="0" y="0"/>
+          <a:chExt cx="0" cy="0"/>
+        </a:xfrm>
+      </p:grpSpPr>
       <p:sp>
         <p:nvSpPr>
           <p:cNvPr id="2" name="Rectangle 1"/>
@@ -3479,7 +3660,7 @@
               </a:defRPr>
             </a:pPr>
             <a:r>
-              <a:t>Go-to-Market Strategy</a:t>
+              <a:t>The Market Problem</a:t>
             </a:r>
           </a:p>
         </p:txBody>
@@ -3493,7 +3674,7 @@
         <p:spPr>
           <a:xfrm>
             <a:off x="731520" y="1097280"/>
-            <a:ext cx="7680960" cy="5303520"/>
+            <a:ext cx="7680960" cy="4975721"/>
           </a:xfrm>
           <a:prstGeom prst="rect">
             <a:avLst/>
@@ -3506,6 +3687,106 @@
           </a:bodyPr>
           <a:lstStyle/>
           <a:p>
+            <a:pPr marL="457200" indent="-457200">
+              <a:spcBef>
+                <a:spcPts val="800"/>
+              </a:spcBef>
+              <a:spcAft>
+                <a:spcPts val="800"/>
+              </a:spcAft>
+              <a:buFont typeface="+mj-lt"/>
+              <a:buAutoNum type="arabicPeriod"/>
+              <a:defRPr sz="2400">
+                <a:solidFill>
+                  <a:srgbClr val="333333"/>
+                </a:solidFill>
+              </a:defRPr>
+            </a:pPr>
+            <a:r>
+              <a:rPr sz="2800" b="1" dirty="0"/>
+              <a:t>Market research is SLOW</a:t>
+            </a:r>
+            <a:r>
+              <a:rPr dirty="0"/>
+              <a:t>: Manual data collection takes 15-20 hours per dataset</a:t>
+            </a:r>
+          </a:p>
+          <a:p>
+            <a:pPr marL="457200" indent="-457200">
+              <a:spcBef>
+                <a:spcPts val="800"/>
+              </a:spcBef>
+              <a:spcAft>
+                <a:spcPts val="800"/>
+              </a:spcAft>
+              <a:buFont typeface="+mj-lt"/>
+              <a:buAutoNum type="arabicPeriod"/>
+              <a:defRPr sz="2400">
+                <a:solidFill>
+                  <a:srgbClr val="333333"/>
+                </a:solidFill>
+              </a:defRPr>
+            </a:pPr>
+            <a:r>
+              <a:rPr sz="2800" b="1" dirty="0"/>
+              <a:t>Web scraping is RISKY</a:t>
+            </a:r>
+            <a:r>
+              <a:rPr dirty="0"/>
+              <a:t>: Blocked by anti-bot measures, legal/GDPR concerns</a:t>
+            </a:r>
+          </a:p>
+          <a:p>
+            <a:pPr marL="457200" indent="-457200">
+              <a:spcBef>
+                <a:spcPts val="800"/>
+              </a:spcBef>
+              <a:spcAft>
+                <a:spcPts val="800"/>
+              </a:spcAft>
+              <a:buFont typeface="+mj-lt"/>
+              <a:buAutoNum type="arabicPeriod"/>
+              <a:defRPr sz="2400">
+                <a:solidFill>
+                  <a:srgbClr val="333333"/>
+                </a:solidFill>
+              </a:defRPr>
+            </a:pPr>
+            <a:r>
+              <a:rPr sz="2800" b="1" dirty="0"/>
+              <a:t>Market data is EXPENSIVE</a:t>
+            </a:r>
+            <a:r>
+              <a:rPr dirty="0"/>
+              <a:t>: Analyst fees + licensing costs €500-1,000+ per month</a:t>
+            </a:r>
+          </a:p>
+          <a:p>
+            <a:pPr marL="457200" indent="-457200">
+              <a:spcBef>
+                <a:spcPts val="800"/>
+              </a:spcBef>
+              <a:spcAft>
+                <a:spcPts val="800"/>
+              </a:spcAft>
+              <a:buFont typeface="+mj-lt"/>
+              <a:buAutoNum type="arabicPeriod"/>
+              <a:defRPr sz="2400">
+                <a:solidFill>
+                  <a:srgbClr val="333333"/>
+                </a:solidFill>
+              </a:defRPr>
+            </a:pPr>
+            <a:r>
+              <a:rPr sz="2800" b="1" dirty="0"/>
+              <a:t>Data is STALE:</a:t>
+            </a:r>
+            <a:r>
+              <a:rPr dirty="0"/>
+              <a:t> By the time insights arrive, markets have moved</a:t>
+            </a:r>
+          </a:p>
+          <a:p>
             <a:pPr>
               <a:spcBef>
                 <a:spcPts val="800"/>
@@ -3520,160 +3801,8 @@
               </a:defRPr>
             </a:pPr>
             <a:r>
-              <a:t>Phase 1 (Months 1-3): Refine retail, land 10-15 customers</a:t>
-            </a:r>
-          </a:p>
-          <a:p>
-            <a:pPr>
-              <a:spcBef>
-                <a:spcPts val="800"/>
-              </a:spcBef>
-              <a:spcAft>
-                <a:spcPts val="800"/>
-              </a:spcAft>
-              <a:defRPr sz="2400">
-                <a:solidFill>
-                  <a:srgbClr val="333333"/>
-                </a:solidFill>
-              </a:defRPr>
-            </a:pPr>
-            <a:r>
-              <a:t>  =&gt; Prove unit economics, build case studies</a:t>
-            </a:r>
-          </a:p>
-          <a:p>
-            <a:pPr>
-              <a:spcBef>
-                <a:spcPts val="800"/>
-              </a:spcBef>
-              <a:spcAft>
-                <a:spcPts val="800"/>
-              </a:spcAft>
-              <a:defRPr sz="2400">
-                <a:solidFill>
-                  <a:srgbClr val="333333"/>
-                </a:solidFill>
-              </a:defRPr>
-            </a:pPr>
-          </a:p>
-          <a:p>
-            <a:pPr>
-              <a:spcBef>
-                <a:spcPts val="800"/>
-              </a:spcBef>
-              <a:spcAft>
-                <a:spcPts val="800"/>
-              </a:spcAft>
-              <a:defRPr sz="2400">
-                <a:solidFill>
-                  <a:srgbClr val="333333"/>
-                </a:solidFill>
-              </a:defRPr>
-            </a:pPr>
-            <a:r>
-              <a:t>Phase 2 (Months 4-6): Launch real estate, expand retail to 30+ customers</a:t>
-            </a:r>
-          </a:p>
-          <a:p>
-            <a:pPr>
-              <a:spcBef>
-                <a:spcPts val="800"/>
-              </a:spcBef>
-              <a:spcAft>
-                <a:spcPts val="800"/>
-              </a:spcAft>
-              <a:defRPr sz="2400">
-                <a:solidFill>
-                  <a:srgbClr val="333333"/>
-                </a:solidFill>
-              </a:defRPr>
-            </a:pPr>
-            <a:r>
-              <a:t>  =&gt; Bundle offer: Retail + Real Estate (25% discount lock-in)</a:t>
-            </a:r>
-          </a:p>
-          <a:p>
-            <a:pPr>
-              <a:spcBef>
-                <a:spcPts val="800"/>
-              </a:spcBef>
-              <a:spcAft>
-                <a:spcPts val="800"/>
-              </a:spcAft>
-              <a:defRPr sz="2400">
-                <a:solidFill>
-                  <a:srgbClr val="333333"/>
-                </a:solidFill>
-              </a:defRPr>
-            </a:pPr>
-          </a:p>
-          <a:p>
-            <a:pPr>
-              <a:spcBef>
-                <a:spcPts val="800"/>
-              </a:spcBef>
-              <a:spcAft>
-                <a:spcPts val="800"/>
-              </a:spcAft>
-              <a:defRPr sz="2400">
-                <a:solidFill>
-                  <a:srgbClr val="333333"/>
-                </a:solidFill>
-              </a:defRPr>
-            </a:pPr>
-            <a:r>
-              <a:t>Phase 3 (Months 7-12): Add automotive, target SMBs &amp; mid-market</a:t>
-            </a:r>
-          </a:p>
-          <a:p>
-            <a:pPr>
-              <a:spcBef>
-                <a:spcPts val="800"/>
-              </a:spcBef>
-              <a:spcAft>
-                <a:spcPts val="800"/>
-              </a:spcAft>
-              <a:defRPr sz="2400">
-                <a:solidFill>
-                  <a:srgbClr val="333333"/>
-                </a:solidFill>
-              </a:defRPr>
-            </a:pPr>
-            <a:r>
-              <a:t>  =&gt; Multi-industry customers get enterprise pricing (€5K+/month)</a:t>
-            </a:r>
-          </a:p>
-          <a:p>
-            <a:pPr>
-              <a:spcBef>
-                <a:spcPts val="800"/>
-              </a:spcBef>
-              <a:spcAft>
-                <a:spcPts val="800"/>
-              </a:spcAft>
-              <a:defRPr sz="2400">
-                <a:solidFill>
-                  <a:srgbClr val="333333"/>
-                </a:solidFill>
-              </a:defRPr>
-            </a:pPr>
-          </a:p>
-          <a:p>
-            <a:pPr>
-              <a:spcBef>
-                <a:spcPts val="800"/>
-              </a:spcBef>
-              <a:spcAft>
-                <a:spcPts val="800"/>
-              </a:spcAft>
-              <a:defRPr sz="2400">
-                <a:solidFill>
-                  <a:srgbClr val="333333"/>
-                </a:solidFill>
-              </a:defRPr>
-            </a:pPr>
-            <a:r>
-              <a:t>Phase 4 (Year 2): Launch data licensing &amp; analytics SaaS</a:t>
+              <a:rPr sz="2800" dirty="0"/>
+              <a:t>SOLUTION: Semi-automatic visual intelligence - fast, accurate, legal &amp; scalable</a:t>
             </a:r>
           </a:p>
         </p:txBody>
@@ -3686,8 +3815,8 @@
 </p:sld>
 </file>
 
-<file path=ppt/slides/slide12.xml><?xml version="1.0" encoding="utf-8"?>
-<p:sld xmlns:a="http://schemas.openxmlformats.org/drawingml/2006/main" xmlns:p="http://schemas.openxmlformats.org/presentationml/2006/main" xmlns:r="http://schemas.openxmlformats.org/officeDocument/2006/relationships">
+<file path=ppt/slides/slide3.xml><?xml version="1.0" encoding="utf-8"?>
+<p:sld xmlns:a="http://schemas.openxmlformats.org/drawingml/2006/main" xmlns:r="http://schemas.openxmlformats.org/officeDocument/2006/relationships" xmlns:p="http://schemas.openxmlformats.org/presentationml/2006/main">
   <p:cSld>
     <p:bg>
       <p:bgPr>
@@ -3703,7 +3832,589 @@
         <p:cNvGrpSpPr/>
         <p:nvPr/>
       </p:nvGrpSpPr>
-      <p:grpSpPr/>
+      <p:grpSpPr>
+        <a:xfrm>
+          <a:off x="0" y="0"/>
+          <a:ext cx="0" cy="0"/>
+          <a:chOff x="0" y="0"/>
+          <a:chExt cx="0" cy="0"/>
+        </a:xfrm>
+      </p:grpSpPr>
+      <p:sp>
+        <p:nvSpPr>
+          <p:cNvPr id="2" name="Rectangle 1"/>
+          <p:cNvSpPr/>
+          <p:nvPr/>
+        </p:nvSpPr>
+        <p:spPr>
+          <a:xfrm>
+            <a:off x="0" y="0"/>
+            <a:ext cx="9144000" cy="1252728"/>
+          </a:xfrm>
+          <a:prstGeom prst="rect">
+            <a:avLst/>
+          </a:prstGeom>
+          <a:solidFill>
+            <a:srgbClr val="1F4E79"/>
+          </a:solidFill>
+          <a:ln>
+            <a:solidFill>
+              <a:srgbClr val="1F4E79"/>
+            </a:solidFill>
+          </a:ln>
+        </p:spPr>
+        <p:style>
+          <a:lnRef idx="1">
+            <a:schemeClr val="accent1"/>
+          </a:lnRef>
+          <a:fillRef idx="3">
+            <a:schemeClr val="accent1"/>
+          </a:fillRef>
+          <a:effectRef idx="2">
+            <a:schemeClr val="accent1"/>
+          </a:effectRef>
+          <a:fontRef idx="minor">
+            <a:schemeClr val="lt1"/>
+          </a:fontRef>
+        </p:style>
+        <p:txBody>
+          <a:bodyPr rtlCol="0" anchor="ctr"/>
+          <a:lstStyle/>
+          <a:p>
+            <a:pPr algn="ctr">
+              <a:spcBef>
+                <a:spcPts val="1000"/>
+              </a:spcBef>
+              <a:spcAft>
+                <a:spcPts val="1000"/>
+              </a:spcAft>
+              <a:defRPr sz="4800" b="1">
+                <a:solidFill>
+                  <a:srgbClr val="FFFFFF"/>
+                </a:solidFill>
+              </a:defRPr>
+            </a:pPr>
+            <a:r>
+              <a:rPr dirty="0"/>
+              <a:t>How Snipper Tool Works: 3-Step Process</a:t>
+            </a:r>
+          </a:p>
+        </p:txBody>
+      </p:sp>
+      <p:sp>
+        <p:nvSpPr>
+          <p:cNvPr id="3" name="TextBox 2"/>
+          <p:cNvSpPr txBox="1"/>
+          <p:nvPr/>
+        </p:nvSpPr>
+        <p:spPr>
+          <a:xfrm>
+            <a:off x="374904" y="1325880"/>
+            <a:ext cx="8302752" cy="4626908"/>
+          </a:xfrm>
+          <a:prstGeom prst="rect">
+            <a:avLst/>
+          </a:prstGeom>
+          <a:noFill/>
+        </p:spPr>
+        <p:txBody>
+          <a:bodyPr wrap="square">
+            <a:spAutoFit/>
+          </a:bodyPr>
+          <a:lstStyle/>
+          <a:p>
+            <a:pPr marL="457200" indent="-457200">
+              <a:spcBef>
+                <a:spcPts val="800"/>
+              </a:spcBef>
+              <a:spcAft>
+                <a:spcPts val="800"/>
+              </a:spcAft>
+              <a:buFont typeface="+mj-lt"/>
+              <a:buAutoNum type="arabicPeriod"/>
+              <a:defRPr sz="2400">
+                <a:solidFill>
+                  <a:srgbClr val="333333"/>
+                </a:solidFill>
+              </a:defRPr>
+            </a:pPr>
+            <a:r>
+              <a:rPr sz="2800" b="1" dirty="0"/>
+              <a:t>CAPTURE:</a:t>
+            </a:r>
+            <a:r>
+              <a:rPr dirty="0"/>
+              <a:t> User takes screenshot with smart overlay (</a:t>
+            </a:r>
+            <a:r>
+              <a:rPr dirty="0" err="1"/>
+              <a:t>Alt+C</a:t>
+            </a:r>
+            <a:r>
+              <a:rPr dirty="0"/>
+              <a:t> hotkey)</a:t>
+            </a:r>
+          </a:p>
+          <a:p>
+            <a:pPr marL="457200" indent="-457200">
+              <a:spcBef>
+                <a:spcPts val="800"/>
+              </a:spcBef>
+              <a:spcAft>
+                <a:spcPts val="800"/>
+              </a:spcAft>
+              <a:buFont typeface="+mj-lt"/>
+              <a:buAutoNum type="arabicPeriod"/>
+              <a:defRPr sz="2400">
+                <a:solidFill>
+                  <a:srgbClr val="333333"/>
+                </a:solidFill>
+              </a:defRPr>
+            </a:pPr>
+            <a:r>
+              <a:rPr sz="2800" b="1" dirty="0"/>
+              <a:t>DETECT:</a:t>
+            </a:r>
+            <a:r>
+              <a:rPr dirty="0"/>
+              <a:t> AI-powered OCR automatically extracts prices &amp; product data</a:t>
+            </a:r>
+          </a:p>
+          <a:p>
+            <a:pPr marL="457200" indent="-457200">
+              <a:spcBef>
+                <a:spcPts val="800"/>
+              </a:spcBef>
+              <a:spcAft>
+                <a:spcPts val="800"/>
+              </a:spcAft>
+              <a:buFont typeface="+mj-lt"/>
+              <a:buAutoNum type="arabicPeriod"/>
+              <a:defRPr sz="2400">
+                <a:solidFill>
+                  <a:srgbClr val="333333"/>
+                </a:solidFill>
+              </a:defRPr>
+            </a:pPr>
+            <a:r>
+              <a:rPr sz="2800" b="1" dirty="0"/>
+              <a:t>ANALYZE:</a:t>
+            </a:r>
+            <a:r>
+              <a:rPr dirty="0"/>
+              <a:t> Data exported as structured JSON for immediate analysis</a:t>
+            </a:r>
+          </a:p>
+          <a:p>
+            <a:pPr>
+              <a:spcBef>
+                <a:spcPts val="800"/>
+              </a:spcBef>
+              <a:spcAft>
+                <a:spcPts val="800"/>
+              </a:spcAft>
+              <a:defRPr sz="2400">
+                <a:solidFill>
+                  <a:srgbClr val="333333"/>
+                </a:solidFill>
+              </a:defRPr>
+            </a:pPr>
+            <a:endParaRPr dirty="0"/>
+          </a:p>
+          <a:p>
+            <a:pPr>
+              <a:spcBef>
+                <a:spcPts val="800"/>
+              </a:spcBef>
+              <a:spcAft>
+                <a:spcPts val="800"/>
+              </a:spcAft>
+              <a:defRPr sz="2400">
+                <a:solidFill>
+                  <a:srgbClr val="333333"/>
+                </a:solidFill>
+              </a:defRPr>
+            </a:pPr>
+            <a:r>
+              <a:rPr dirty="0"/>
+              <a:t>TIME: 40 seconds per product vs 2 minutes manual (5x faster)</a:t>
+            </a:r>
+          </a:p>
+          <a:p>
+            <a:pPr>
+              <a:spcBef>
+                <a:spcPts val="800"/>
+              </a:spcBef>
+              <a:spcAft>
+                <a:spcPts val="800"/>
+              </a:spcAft>
+              <a:defRPr sz="2400">
+                <a:solidFill>
+                  <a:srgbClr val="333333"/>
+                </a:solidFill>
+              </a:defRPr>
+            </a:pPr>
+            <a:r>
+              <a:rPr dirty="0"/>
+              <a:t>ACCURACY: 100% validated data ready for analytics &amp; reporting</a:t>
+            </a:r>
+          </a:p>
+        </p:txBody>
+      </p:sp>
+    </p:spTree>
+  </p:cSld>
+  <p:clrMapOvr>
+    <a:masterClrMapping/>
+  </p:clrMapOvr>
+</p:sld>
+</file>
+
+<file path=ppt/slides/slide4.xml><?xml version="1.0" encoding="utf-8"?>
+<p:sld xmlns:a="http://schemas.openxmlformats.org/drawingml/2006/main" xmlns:r="http://schemas.openxmlformats.org/officeDocument/2006/relationships" xmlns:p="http://schemas.openxmlformats.org/presentationml/2006/main">
+  <p:cSld>
+    <p:bg>
+      <p:bgPr>
+        <a:solidFill>
+          <a:srgbClr val="FFFFFF"/>
+        </a:solidFill>
+        <a:effectLst/>
+      </p:bgPr>
+    </p:bg>
+    <p:spTree>
+      <p:nvGrpSpPr>
+        <p:cNvPr id="1" name=""/>
+        <p:cNvGrpSpPr/>
+        <p:nvPr/>
+      </p:nvGrpSpPr>
+      <p:grpSpPr>
+        <a:xfrm>
+          <a:off x="0" y="0"/>
+          <a:ext cx="0" cy="0"/>
+          <a:chOff x="0" y="0"/>
+          <a:chExt cx="0" cy="0"/>
+        </a:xfrm>
+      </p:grpSpPr>
+      <p:sp>
+        <p:nvSpPr>
+          <p:cNvPr id="2" name="Rectangle 1"/>
+          <p:cNvSpPr/>
+          <p:nvPr/>
+        </p:nvSpPr>
+        <p:spPr>
+          <a:xfrm>
+            <a:off x="0" y="0"/>
+            <a:ext cx="9144000" cy="1298448"/>
+          </a:xfrm>
+          <a:prstGeom prst="rect">
+            <a:avLst/>
+          </a:prstGeom>
+          <a:solidFill>
+            <a:srgbClr val="1F4E79"/>
+          </a:solidFill>
+          <a:ln>
+            <a:solidFill>
+              <a:srgbClr val="1F4E79"/>
+            </a:solidFill>
+          </a:ln>
+        </p:spPr>
+        <p:style>
+          <a:lnRef idx="1">
+            <a:schemeClr val="accent1"/>
+          </a:lnRef>
+          <a:fillRef idx="3">
+            <a:schemeClr val="accent1"/>
+          </a:fillRef>
+          <a:effectRef idx="2">
+            <a:schemeClr val="accent1"/>
+          </a:effectRef>
+          <a:fontRef idx="minor">
+            <a:schemeClr val="lt1"/>
+          </a:fontRef>
+        </p:style>
+        <p:txBody>
+          <a:bodyPr rtlCol="0" anchor="ctr"/>
+          <a:lstStyle/>
+          <a:p>
+            <a:pPr algn="ctr">
+              <a:spcBef>
+                <a:spcPts val="1000"/>
+              </a:spcBef>
+              <a:spcAft>
+                <a:spcPts val="1000"/>
+              </a:spcAft>
+              <a:defRPr sz="4800" b="1">
+                <a:solidFill>
+                  <a:srgbClr val="FFFFFF"/>
+                </a:solidFill>
+              </a:defRPr>
+            </a:pPr>
+            <a:r>
+              <a:t>Financial Case: Supermarket Monitoring</a:t>
+            </a:r>
+          </a:p>
+        </p:txBody>
+      </p:sp>
+      <p:sp>
+        <p:nvSpPr>
+          <p:cNvPr id="3" name="TextBox 2"/>
+          <p:cNvSpPr txBox="1"/>
+          <p:nvPr/>
+        </p:nvSpPr>
+        <p:spPr>
+          <a:xfrm>
+            <a:off x="466344" y="1362456"/>
+            <a:ext cx="8531352" cy="5170646"/>
+          </a:xfrm>
+          <a:prstGeom prst="rect">
+            <a:avLst/>
+          </a:prstGeom>
+          <a:noFill/>
+        </p:spPr>
+        <p:txBody>
+          <a:bodyPr wrap="square">
+            <a:spAutoFit/>
+          </a:bodyPr>
+          <a:lstStyle/>
+          <a:p>
+            <a:pPr>
+              <a:spcBef>
+                <a:spcPts val="600"/>
+              </a:spcBef>
+              <a:spcAft>
+                <a:spcPts val="600"/>
+              </a:spcAft>
+              <a:defRPr sz="2400">
+                <a:solidFill>
+                  <a:srgbClr val="333333"/>
+                </a:solidFill>
+              </a:defRPr>
+            </a:pPr>
+            <a:r>
+              <a:rPr dirty="0"/>
+              <a:t>Weekly Collection: </a:t>
+            </a:r>
+            <a:endParaRPr lang="en-US" dirty="0"/>
+          </a:p>
+          <a:p>
+            <a:pPr marL="342900" indent="-342900">
+              <a:spcBef>
+                <a:spcPts val="600"/>
+              </a:spcBef>
+              <a:spcAft>
+                <a:spcPts val="600"/>
+              </a:spcAft>
+              <a:buFont typeface="Arial" panose="020B0604020202020204" pitchFamily="34" charset="0"/>
+              <a:buChar char="•"/>
+              <a:defRPr sz="2400">
+                <a:solidFill>
+                  <a:srgbClr val="333333"/>
+                </a:solidFill>
+              </a:defRPr>
+            </a:pPr>
+            <a:r>
+              <a:rPr dirty="0"/>
+              <a:t>500 products across 5 stores (€146.74/week = €7,630/year)</a:t>
+            </a:r>
+          </a:p>
+          <a:p>
+            <a:pPr>
+              <a:spcBef>
+                <a:spcPts val="600"/>
+              </a:spcBef>
+              <a:spcAft>
+                <a:spcPts val="600"/>
+              </a:spcAft>
+              <a:defRPr sz="2400">
+                <a:solidFill>
+                  <a:srgbClr val="333333"/>
+                </a:solidFill>
+              </a:defRPr>
+            </a:pPr>
+            <a:r>
+              <a:rPr dirty="0"/>
+              <a:t>Manual Alternative: </a:t>
+            </a:r>
+            <a:endParaRPr lang="en-US" dirty="0"/>
+          </a:p>
+          <a:p>
+            <a:pPr marL="342900" indent="-342900">
+              <a:spcBef>
+                <a:spcPts val="600"/>
+              </a:spcBef>
+              <a:spcAft>
+                <a:spcPts val="600"/>
+              </a:spcAft>
+              <a:buFont typeface="Arial" panose="020B0604020202020204" pitchFamily="34" charset="0"/>
+              <a:buChar char="•"/>
+              <a:defRPr sz="2400">
+                <a:solidFill>
+                  <a:srgbClr val="333333"/>
+                </a:solidFill>
+              </a:defRPr>
+            </a:pPr>
+            <a:r>
+              <a:rPr dirty="0"/>
+              <a:t>Would cost €45,500/year (€875/week)</a:t>
+            </a:r>
+          </a:p>
+          <a:p>
+            <a:pPr>
+              <a:spcBef>
+                <a:spcPts val="600"/>
+              </a:spcBef>
+              <a:spcAft>
+                <a:spcPts val="600"/>
+              </a:spcAft>
+              <a:defRPr sz="2400">
+                <a:solidFill>
+                  <a:srgbClr val="333333"/>
+                </a:solidFill>
+              </a:defRPr>
+            </a:pPr>
+            <a:r>
+              <a:rPr dirty="0"/>
+              <a:t>ANNUAL SAVINGS: </a:t>
+            </a:r>
+            <a:endParaRPr lang="en-US" dirty="0"/>
+          </a:p>
+          <a:p>
+            <a:pPr marL="342900" indent="-342900">
+              <a:spcBef>
+                <a:spcPts val="600"/>
+              </a:spcBef>
+              <a:spcAft>
+                <a:spcPts val="600"/>
+              </a:spcAft>
+              <a:buFont typeface="Arial" panose="020B0604020202020204" pitchFamily="34" charset="0"/>
+              <a:buChar char="•"/>
+              <a:defRPr sz="2400">
+                <a:solidFill>
+                  <a:srgbClr val="333333"/>
+                </a:solidFill>
+              </a:defRPr>
+            </a:pPr>
+            <a:r>
+              <a:rPr dirty="0"/>
+              <a:t>€37,870 per customer (83% cost reduction)</a:t>
+            </a:r>
+          </a:p>
+          <a:p>
+            <a:pPr>
+              <a:spcBef>
+                <a:spcPts val="600"/>
+              </a:spcBef>
+              <a:spcAft>
+                <a:spcPts val="600"/>
+              </a:spcAft>
+              <a:defRPr sz="2400">
+                <a:solidFill>
+                  <a:srgbClr val="333333"/>
+                </a:solidFill>
+              </a:defRPr>
+            </a:pPr>
+            <a:r>
+              <a:rPr dirty="0"/>
+              <a:t>YOUR REVENUE: </a:t>
+            </a:r>
+            <a:endParaRPr lang="en-US" dirty="0"/>
+          </a:p>
+          <a:p>
+            <a:pPr marL="342900" indent="-342900">
+              <a:spcBef>
+                <a:spcPts val="600"/>
+              </a:spcBef>
+              <a:spcAft>
+                <a:spcPts val="600"/>
+              </a:spcAft>
+              <a:buFont typeface="Arial" panose="020B0604020202020204" pitchFamily="34" charset="0"/>
+              <a:buChar char="•"/>
+              <a:defRPr sz="2400">
+                <a:solidFill>
+                  <a:srgbClr val="333333"/>
+                </a:solidFill>
+              </a:defRPr>
+            </a:pPr>
+            <a:r>
+              <a:rPr dirty="0"/>
+              <a:t>Sell for €200-400/month = €2,400-4,800/year per customer</a:t>
+            </a:r>
+          </a:p>
+          <a:p>
+            <a:pPr>
+              <a:spcBef>
+                <a:spcPts val="600"/>
+              </a:spcBef>
+              <a:spcAft>
+                <a:spcPts val="600"/>
+              </a:spcAft>
+              <a:defRPr sz="2400">
+                <a:solidFill>
+                  <a:srgbClr val="333333"/>
+                </a:solidFill>
+              </a:defRPr>
+            </a:pPr>
+            <a:r>
+              <a:rPr dirty="0"/>
+              <a:t>Gross margin: </a:t>
+            </a:r>
+            <a:endParaRPr lang="en-US" dirty="0"/>
+          </a:p>
+          <a:p>
+            <a:pPr marL="342900" indent="-342900">
+              <a:spcBef>
+                <a:spcPts val="600"/>
+              </a:spcBef>
+              <a:spcAft>
+                <a:spcPts val="600"/>
+              </a:spcAft>
+              <a:buFont typeface="Arial" panose="020B0604020202020204" pitchFamily="34" charset="0"/>
+              <a:buChar char="•"/>
+              <a:defRPr sz="2400">
+                <a:solidFill>
+                  <a:srgbClr val="333333"/>
+                </a:solidFill>
+              </a:defRPr>
+            </a:pPr>
+            <a:r>
+              <a:rPr dirty="0"/>
+              <a:t>68-84% (You get €1,600-3,000 of the €7,630 savings)</a:t>
+            </a:r>
+          </a:p>
+        </p:txBody>
+      </p:sp>
+    </p:spTree>
+  </p:cSld>
+  <p:clrMapOvr>
+    <a:masterClrMapping/>
+  </p:clrMapOvr>
+</p:sld>
+</file>
+
+<file path=ppt/slides/slide5.xml><?xml version="1.0" encoding="utf-8"?>
+<p:sld xmlns:a="http://schemas.openxmlformats.org/drawingml/2006/main" xmlns:r="http://schemas.openxmlformats.org/officeDocument/2006/relationships" xmlns:p="http://schemas.openxmlformats.org/presentationml/2006/main">
+  <p:cSld>
+    <p:bg>
+      <p:bgPr>
+        <a:solidFill>
+          <a:srgbClr val="FFFFFF"/>
+        </a:solidFill>
+        <a:effectLst/>
+      </p:bgPr>
+    </p:bg>
+    <p:spTree>
+      <p:nvGrpSpPr>
+        <p:cNvPr id="1" name=""/>
+        <p:cNvGrpSpPr/>
+        <p:nvPr/>
+      </p:nvGrpSpPr>
+      <p:grpSpPr>
+        <a:xfrm>
+          <a:off x="0" y="0"/>
+          <a:ext cx="0" cy="0"/>
+          <a:chOff x="0" y="0"/>
+          <a:chExt cx="0" cy="0"/>
+        </a:xfrm>
+      </p:grpSpPr>
       <p:sp>
         <p:nvSpPr>
           <p:cNvPr id="2" name="Rectangle 1"/>
@@ -3759,7 +4470,7 @@
               </a:defRPr>
             </a:pPr>
             <a:r>
-              <a:t>Why Snipper Tool Wins</a:t>
+              <a:t>3-Stream Revenue Model</a:t>
             </a:r>
           </a:p>
         </p:txBody>
@@ -3772,8 +4483,8 @@
         </p:nvSpPr>
         <p:spPr>
           <a:xfrm>
-            <a:off x="731520" y="1097280"/>
-            <a:ext cx="7680960" cy="5303520"/>
+            <a:off x="347472" y="1097280"/>
+            <a:ext cx="8284464" cy="4278094"/>
           </a:xfrm>
           <a:prstGeom prst="rect">
             <a:avLst/>
@@ -3800,7 +4511,54 @@
               </a:defRPr>
             </a:pPr>
             <a:r>
-              <a:t>Speed: 5x faster than manual (5.07h vs 19h/week)</a:t>
+              <a:rPr dirty="0"/>
+              <a:t>Stream 1: SaaS Subscriptions</a:t>
+            </a:r>
+          </a:p>
+          <a:p>
+            <a:pPr marL="342900" indent="-342900">
+              <a:spcBef>
+                <a:spcPts val="800"/>
+              </a:spcBef>
+              <a:spcAft>
+                <a:spcPts val="800"/>
+              </a:spcAft>
+              <a:buFont typeface="Arial" panose="020B0604020202020204" pitchFamily="34" charset="0"/>
+              <a:buChar char="•"/>
+              <a:defRPr sz="2400">
+                <a:solidFill>
+                  <a:srgbClr val="333333"/>
+                </a:solidFill>
+              </a:defRPr>
+            </a:pPr>
+            <a:r>
+              <a:rPr lang="fr-FR" dirty="0"/>
+              <a:t>€</a:t>
+            </a:r>
+            <a:r>
+              <a:rPr dirty="0"/>
+              <a:t>50-200/month: Solo analyst (1 store, 100 products/week)</a:t>
+            </a:r>
+          </a:p>
+          <a:p>
+            <a:pPr marL="342900" indent="-342900">
+              <a:spcBef>
+                <a:spcPts val="800"/>
+              </a:spcBef>
+              <a:spcAft>
+                <a:spcPts val="800"/>
+              </a:spcAft>
+              <a:buFont typeface="Arial" panose="020B0604020202020204" pitchFamily="34" charset="0"/>
+              <a:buChar char="•"/>
+              <a:defRPr sz="2400">
+                <a:solidFill>
+                  <a:srgbClr val="333333"/>
+                </a:solidFill>
+              </a:defRPr>
+            </a:pPr>
+            <a:r>
+              <a:rPr dirty="0"/>
+              <a:t>€200-500/month: Enterprise tier (5+ stores, 1000+ products/week)</a:t>
             </a:r>
           </a:p>
           <a:p>
@@ -3818,7 +4576,30 @@
               </a:defRPr>
             </a:pPr>
             <a:r>
-              <a:t>Accuracy: 100% validated data (vs 85% manual, 10% scraping)</a:t>
+              <a:rPr dirty="0"/>
+              <a:t>Stream 2: </a:t>
+            </a:r>
+            <a:endParaRPr lang="en-US" dirty="0"/>
+          </a:p>
+          <a:p>
+            <a:pPr marL="342900" indent="-342900">
+              <a:spcBef>
+                <a:spcPts val="800"/>
+              </a:spcBef>
+              <a:spcAft>
+                <a:spcPts val="800"/>
+              </a:spcAft>
+              <a:buFont typeface="Arial" panose="020B0604020202020204" pitchFamily="34" charset="0"/>
+              <a:buChar char="•"/>
+              <a:defRPr sz="2400">
+                <a:solidFill>
+                  <a:srgbClr val="333333"/>
+                </a:solidFill>
+              </a:defRPr>
+            </a:pPr>
+            <a:r>
+              <a:rPr dirty="0"/>
+              <a:t>Data Licensing - €500-5,000/month for aggregated datasets</a:t>
             </a:r>
           </a:p>
           <a:p>
@@ -3836,17 +4617,21 @@
               </a:defRPr>
             </a:pPr>
             <a:r>
-              <a:t>Legal: Zero IP bans, no GDPR violations (vs scraping risks)</a:t>
-            </a:r>
-          </a:p>
-          <a:p>
-            <a:pPr>
-              <a:spcBef>
-                <a:spcPts val="800"/>
-              </a:spcBef>
-              <a:spcAft>
-                <a:spcPts val="800"/>
-              </a:spcAft>
+              <a:rPr dirty="0"/>
+              <a:t>Stream 3:</a:t>
+            </a:r>
+            <a:endParaRPr lang="en-US" dirty="0"/>
+          </a:p>
+          <a:p>
+            <a:pPr marL="342900" indent="-342900">
+              <a:spcBef>
+                <a:spcPts val="800"/>
+              </a:spcBef>
+              <a:spcAft>
+                <a:spcPts val="800"/>
+              </a:spcAft>
+              <a:buFont typeface="Arial" panose="020B0604020202020204" pitchFamily="34" charset="0"/>
+              <a:buChar char="•"/>
               <a:defRPr sz="2400">
                 <a:solidFill>
                   <a:srgbClr val="333333"/>
@@ -3854,43 +4639,8 @@
               </a:defRPr>
             </a:pPr>
             <a:r>
-              <a:t>Cost: €7,630/year operational (vs €45.5K manual or €235K scraping)</a:t>
-            </a:r>
-          </a:p>
-          <a:p>
-            <a:pPr>
-              <a:spcBef>
-                <a:spcPts val="800"/>
-              </a:spcBef>
-              <a:spcAft>
-                <a:spcPts val="800"/>
-              </a:spcAft>
-              <a:defRPr sz="2400">
-                <a:solidFill>
-                  <a:srgbClr val="333333"/>
-                </a:solidFill>
-              </a:defRPr>
-            </a:pPr>
-            <a:r>
-              <a:t>Scalable: Add stores/products without adding people</a:t>
-            </a:r>
-          </a:p>
-          <a:p>
-            <a:pPr>
-              <a:spcBef>
-                <a:spcPts val="800"/>
-              </a:spcBef>
-              <a:spcAft>
-                <a:spcPts val="800"/>
-              </a:spcAft>
-              <a:defRPr sz="2400">
-                <a:solidFill>
-                  <a:srgbClr val="333333"/>
-                </a:solidFill>
-              </a:defRPr>
-            </a:pPr>
-            <a:r>
-              <a:t>Repeatable: Works week after week with zero maintenance</a:t>
+              <a:rPr dirty="0"/>
+              <a:t>Consulting - €5,000-50,000 for custom deployments</a:t>
             </a:r>
           </a:p>
         </p:txBody>
@@ -3903,8 +4653,8 @@
 </p:sld>
 </file>
 
-<file path=ppt/slides/slide13.xml><?xml version="1.0" encoding="utf-8"?>
-<p:sld xmlns:a="http://schemas.openxmlformats.org/drawingml/2006/main" xmlns:p="http://schemas.openxmlformats.org/presentationml/2006/main" xmlns:r="http://schemas.openxmlformats.org/officeDocument/2006/relationships">
+<file path=ppt/slides/slide6.xml><?xml version="1.0" encoding="utf-8"?>
+<p:sld xmlns:a="http://schemas.openxmlformats.org/drawingml/2006/main" xmlns:r="http://schemas.openxmlformats.org/officeDocument/2006/relationships" xmlns:p="http://schemas.openxmlformats.org/presentationml/2006/main">
   <p:cSld>
     <p:bg>
       <p:bgPr>
@@ -3920,7 +4670,473 @@
         <p:cNvGrpSpPr/>
         <p:nvPr/>
       </p:nvGrpSpPr>
-      <p:grpSpPr/>
+      <p:grpSpPr>
+        <a:xfrm>
+          <a:off x="0" y="0"/>
+          <a:ext cx="0" cy="0"/>
+          <a:chOff x="0" y="0"/>
+          <a:chExt cx="0" cy="0"/>
+        </a:xfrm>
+      </p:grpSpPr>
+      <p:sp>
+        <p:nvSpPr>
+          <p:cNvPr id="2" name="Rectangle 1"/>
+          <p:cNvSpPr/>
+          <p:nvPr/>
+        </p:nvSpPr>
+        <p:spPr>
+          <a:xfrm>
+            <a:off x="0" y="0"/>
+            <a:ext cx="9144000" cy="1444752"/>
+          </a:xfrm>
+          <a:prstGeom prst="rect">
+            <a:avLst/>
+          </a:prstGeom>
+          <a:solidFill>
+            <a:srgbClr val="1F4E79"/>
+          </a:solidFill>
+          <a:ln>
+            <a:solidFill>
+              <a:srgbClr val="1F4E79"/>
+            </a:solidFill>
+          </a:ln>
+        </p:spPr>
+        <p:style>
+          <a:lnRef idx="1">
+            <a:schemeClr val="accent1"/>
+          </a:lnRef>
+          <a:fillRef idx="3">
+            <a:schemeClr val="accent1"/>
+          </a:fillRef>
+          <a:effectRef idx="2">
+            <a:schemeClr val="accent1"/>
+          </a:effectRef>
+          <a:fontRef idx="minor">
+            <a:schemeClr val="lt1"/>
+          </a:fontRef>
+        </p:style>
+        <p:txBody>
+          <a:bodyPr rtlCol="0" anchor="ctr"/>
+          <a:lstStyle/>
+          <a:p>
+            <a:pPr algn="ctr">
+              <a:spcBef>
+                <a:spcPts val="1000"/>
+              </a:spcBef>
+              <a:spcAft>
+                <a:spcPts val="1000"/>
+              </a:spcAft>
+              <a:defRPr sz="4800" b="1">
+                <a:solidFill>
+                  <a:srgbClr val="FFFFFF"/>
+                </a:solidFill>
+              </a:defRPr>
+            </a:pPr>
+            <a:r>
+              <a:t>Application #1: Retail Price Monitoring (Current)</a:t>
+            </a:r>
+          </a:p>
+        </p:txBody>
+      </p:sp>
+      <p:sp>
+        <p:nvSpPr>
+          <p:cNvPr id="5" name="TextBox 4">
+            <a:extLst>
+              <a:ext uri="{FF2B5EF4-FFF2-40B4-BE49-F238E27FC236}">
+                <a16:creationId xmlns:a16="http://schemas.microsoft.com/office/drawing/2014/main" id="{C22E12D1-648D-5099-D134-4B0ABF453E2F}"/>
+              </a:ext>
+            </a:extLst>
+          </p:cNvPr>
+          <p:cNvSpPr txBox="1"/>
+          <p:nvPr/>
+        </p:nvSpPr>
+        <p:spPr>
+          <a:xfrm>
+            <a:off x="310897" y="1645920"/>
+            <a:ext cx="3813048" cy="3744615"/>
+          </a:xfrm>
+          <a:prstGeom prst="rect">
+            <a:avLst/>
+          </a:prstGeom>
+          <a:noFill/>
+        </p:spPr>
+        <p:txBody>
+          <a:bodyPr wrap="square" rtlCol="0">
+            <a:spAutoFit/>
+          </a:bodyPr>
+          <a:lstStyle/>
+          <a:p>
+            <a:pPr>
+              <a:spcAft>
+                <a:spcPts val="1200"/>
+              </a:spcAft>
+              <a:defRPr sz="2400" b="1">
+                <a:solidFill>
+                  <a:srgbClr val="4F81BD"/>
+                </a:solidFill>
+              </a:defRPr>
+            </a:pPr>
+            <a:r>
+              <a:rPr lang="fr-FR" dirty="0"/>
+              <a:t>Market Opportunity</a:t>
+            </a:r>
+          </a:p>
+          <a:p>
+            <a:pPr>
+              <a:spcAft>
+                <a:spcPts val="1000"/>
+              </a:spcAft>
+              <a:defRPr sz="1900">
+                <a:solidFill>
+                  <a:srgbClr val="333333"/>
+                </a:solidFill>
+              </a:defRPr>
+            </a:pPr>
+            <a:r>
+              <a:rPr lang="fr-FR" dirty="0"/>
+              <a:t>• Target: </a:t>
+            </a:r>
+            <a:r>
+              <a:rPr lang="fr-FR" dirty="0" err="1"/>
+              <a:t>Supermarket</a:t>
+            </a:r>
+            <a:r>
+              <a:rPr lang="fr-FR" dirty="0"/>
+              <a:t> </a:t>
+            </a:r>
+            <a:r>
+              <a:rPr lang="fr-FR" dirty="0" err="1"/>
+              <a:t>chains</a:t>
+            </a:r>
+            <a:r>
+              <a:rPr lang="fr-FR" dirty="0"/>
+              <a:t>, CPG brands, </a:t>
+            </a:r>
+            <a:r>
+              <a:rPr lang="fr-FR" dirty="0" err="1"/>
+              <a:t>price</a:t>
+            </a:r>
+            <a:r>
+              <a:rPr lang="fr-FR" dirty="0"/>
+              <a:t> platforms</a:t>
+            </a:r>
+          </a:p>
+          <a:p>
+            <a:pPr>
+              <a:spcAft>
+                <a:spcPts val="1000"/>
+              </a:spcAft>
+              <a:defRPr sz="1900">
+                <a:solidFill>
+                  <a:srgbClr val="333333"/>
+                </a:solidFill>
+              </a:defRPr>
+            </a:pPr>
+            <a:r>
+              <a:rPr lang="fr-FR" dirty="0"/>
+              <a:t>• Market: €200M+ in </a:t>
+            </a:r>
+            <a:r>
+              <a:rPr lang="fr-FR" dirty="0" err="1"/>
+              <a:t>retail</a:t>
+            </a:r>
+            <a:r>
+              <a:rPr lang="fr-FR" dirty="0"/>
+              <a:t> </a:t>
+            </a:r>
+            <a:r>
+              <a:rPr lang="fr-FR" dirty="0" err="1"/>
+              <a:t>analytics</a:t>
+            </a:r>
+            <a:r>
+              <a:rPr lang="fr-FR" dirty="0"/>
+              <a:t> </a:t>
+            </a:r>
+            <a:r>
+              <a:rPr lang="fr-FR" dirty="0" err="1"/>
+              <a:t>annually</a:t>
+            </a:r>
+            <a:endParaRPr lang="fr-FR" dirty="0"/>
+          </a:p>
+          <a:p>
+            <a:pPr>
+              <a:spcAft>
+                <a:spcPts val="1000"/>
+              </a:spcAft>
+              <a:defRPr sz="1900">
+                <a:solidFill>
+                  <a:srgbClr val="333333"/>
+                </a:solidFill>
+              </a:defRPr>
+            </a:pPr>
+            <a:r>
+              <a:rPr lang="fr-FR" dirty="0"/>
+              <a:t>• Uses: </a:t>
+            </a:r>
+            <a:r>
+              <a:rPr lang="fr-FR" dirty="0" err="1"/>
+              <a:t>Competitive</a:t>
+            </a:r>
+            <a:r>
+              <a:rPr lang="fr-FR" dirty="0"/>
+              <a:t> </a:t>
+            </a:r>
+            <a:r>
+              <a:rPr lang="fr-FR" dirty="0" err="1"/>
+              <a:t>pricing</a:t>
+            </a:r>
+            <a:r>
+              <a:rPr lang="fr-FR" dirty="0"/>
+              <a:t>, promotions, </a:t>
+            </a:r>
+            <a:r>
+              <a:rPr lang="fr-FR" dirty="0" err="1"/>
+              <a:t>margins</a:t>
+            </a:r>
+            <a:endParaRPr lang="fr-FR" dirty="0"/>
+          </a:p>
+          <a:p>
+            <a:pPr>
+              <a:spcAft>
+                <a:spcPts val="1000"/>
+              </a:spcAft>
+              <a:defRPr sz="1900">
+                <a:solidFill>
+                  <a:srgbClr val="333333"/>
+                </a:solidFill>
+              </a:defRPr>
+            </a:pPr>
+            <a:r>
+              <a:rPr lang="fr-FR" dirty="0"/>
+              <a:t>• </a:t>
+            </a:r>
+            <a:r>
+              <a:rPr lang="fr-FR" dirty="0" err="1"/>
+              <a:t>Geography</a:t>
+            </a:r>
+            <a:r>
+              <a:rPr lang="fr-FR" dirty="0"/>
+              <a:t>: EU-</a:t>
+            </a:r>
+            <a:r>
+              <a:rPr lang="fr-FR" dirty="0" err="1"/>
+              <a:t>wide</a:t>
+            </a:r>
+            <a:r>
+              <a:rPr lang="fr-FR" dirty="0"/>
+              <a:t> (France, Spain, Germany, UK)</a:t>
+            </a:r>
+          </a:p>
+          <a:p>
+            <a:endParaRPr lang="fr-FR" dirty="0"/>
+          </a:p>
+        </p:txBody>
+      </p:sp>
+      <p:sp>
+        <p:nvSpPr>
+          <p:cNvPr id="6" name="TextBox 5">
+            <a:extLst>
+              <a:ext uri="{FF2B5EF4-FFF2-40B4-BE49-F238E27FC236}">
+                <a16:creationId xmlns:a16="http://schemas.microsoft.com/office/drawing/2014/main" id="{22665D9B-5508-0B4B-2C4B-5CD68F832393}"/>
+              </a:ext>
+            </a:extLst>
+          </p:cNvPr>
+          <p:cNvSpPr txBox="1"/>
+          <p:nvPr/>
+        </p:nvSpPr>
+        <p:spPr>
+          <a:xfrm>
+            <a:off x="4489704" y="1645920"/>
+            <a:ext cx="4197096" cy="3159839"/>
+          </a:xfrm>
+          <a:prstGeom prst="rect">
+            <a:avLst/>
+          </a:prstGeom>
+          <a:noFill/>
+        </p:spPr>
+        <p:txBody>
+          <a:bodyPr wrap="square" rtlCol="0">
+            <a:spAutoFit/>
+          </a:bodyPr>
+          <a:lstStyle/>
+          <a:p>
+            <a:pPr>
+              <a:spcAft>
+                <a:spcPts val="1200"/>
+              </a:spcAft>
+              <a:defRPr sz="2400" b="1">
+                <a:solidFill>
+                  <a:srgbClr val="4F81BD"/>
+                </a:solidFill>
+              </a:defRPr>
+            </a:pPr>
+            <a:r>
+              <a:rPr lang="fr-FR" dirty="0"/>
+              <a:t>Revenue </a:t>
+            </a:r>
+            <a:r>
+              <a:rPr lang="fr-FR" dirty="0" err="1"/>
+              <a:t>Potential</a:t>
+            </a:r>
+            <a:endParaRPr lang="fr-FR" dirty="0"/>
+          </a:p>
+          <a:p>
+            <a:pPr>
+              <a:spcAft>
+                <a:spcPts val="1000"/>
+              </a:spcAft>
+              <a:defRPr sz="1900">
+                <a:solidFill>
+                  <a:srgbClr val="333333"/>
+                </a:solidFill>
+              </a:defRPr>
+            </a:pPr>
+            <a:r>
+              <a:rPr lang="fr-FR" dirty="0"/>
+              <a:t>• 50 </a:t>
+            </a:r>
+            <a:r>
+              <a:rPr lang="fr-FR" dirty="0" err="1"/>
+              <a:t>customers</a:t>
+            </a:r>
+            <a:r>
+              <a:rPr lang="fr-FR" dirty="0"/>
+              <a:t> @ €250/</a:t>
+            </a:r>
+            <a:r>
+              <a:rPr lang="fr-FR" dirty="0" err="1"/>
+              <a:t>month</a:t>
+            </a:r>
+            <a:r>
+              <a:rPr lang="fr-FR" dirty="0"/>
+              <a:t> = €150,000/</a:t>
+            </a:r>
+            <a:r>
+              <a:rPr lang="fr-FR" dirty="0" err="1"/>
+              <a:t>year</a:t>
+            </a:r>
+            <a:endParaRPr lang="fr-FR" dirty="0"/>
+          </a:p>
+          <a:p>
+            <a:pPr>
+              <a:spcAft>
+                <a:spcPts val="1000"/>
+              </a:spcAft>
+              <a:defRPr sz="1900">
+                <a:solidFill>
+                  <a:srgbClr val="333333"/>
+                </a:solidFill>
+              </a:defRPr>
+            </a:pPr>
+            <a:r>
+              <a:rPr lang="fr-FR" dirty="0"/>
+              <a:t>• Data </a:t>
+            </a:r>
+            <a:r>
+              <a:rPr lang="fr-FR" dirty="0" err="1"/>
+              <a:t>licensing</a:t>
+            </a:r>
+            <a:r>
+              <a:rPr lang="fr-FR" dirty="0"/>
+              <a:t>: €2K-5K/</a:t>
+            </a:r>
+            <a:r>
+              <a:rPr lang="fr-FR" dirty="0" err="1"/>
+              <a:t>month</a:t>
+            </a:r>
+            <a:r>
+              <a:rPr lang="fr-FR" dirty="0"/>
+              <a:t> = €24K-60K/</a:t>
+            </a:r>
+            <a:r>
+              <a:rPr lang="fr-FR" dirty="0" err="1"/>
+              <a:t>year</a:t>
+            </a:r>
+            <a:endParaRPr lang="fr-FR" dirty="0"/>
+          </a:p>
+          <a:p>
+            <a:pPr>
+              <a:spcAft>
+                <a:spcPts val="1000"/>
+              </a:spcAft>
+              <a:defRPr sz="1900">
+                <a:solidFill>
+                  <a:srgbClr val="333333"/>
+                </a:solidFill>
+              </a:defRPr>
+            </a:pPr>
+            <a:r>
+              <a:rPr lang="fr-FR" dirty="0"/>
+              <a:t>• Consulting: 10 x €10K = €100K/</a:t>
+            </a:r>
+            <a:r>
+              <a:rPr lang="fr-FR" dirty="0" err="1"/>
+              <a:t>year</a:t>
+            </a:r>
+            <a:endParaRPr lang="fr-FR" dirty="0"/>
+          </a:p>
+          <a:p>
+            <a:pPr>
+              <a:spcAft>
+                <a:spcPts val="1000"/>
+              </a:spcAft>
+              <a:defRPr sz="1900">
+                <a:solidFill>
+                  <a:srgbClr val="333333"/>
+                </a:solidFill>
+              </a:defRPr>
+            </a:pPr>
+            <a:r>
+              <a:rPr lang="fr-FR" dirty="0"/>
+              <a:t>• TOTAL: €274K-310K </a:t>
+            </a:r>
+            <a:r>
+              <a:rPr lang="fr-FR" dirty="0" err="1"/>
+              <a:t>Year</a:t>
+            </a:r>
+            <a:r>
+              <a:rPr lang="fr-FR" dirty="0"/>
+              <a:t> 1</a:t>
+            </a:r>
+          </a:p>
+          <a:p>
+            <a:endParaRPr lang="fr-FR" dirty="0"/>
+          </a:p>
+        </p:txBody>
+      </p:sp>
+    </p:spTree>
+  </p:cSld>
+  <p:clrMapOvr>
+    <a:masterClrMapping/>
+  </p:clrMapOvr>
+</p:sld>
+</file>
+
+<file path=ppt/slides/slide7.xml><?xml version="1.0" encoding="utf-8"?>
+<p:sld xmlns:a="http://schemas.openxmlformats.org/drawingml/2006/main" xmlns:r="http://schemas.openxmlformats.org/officeDocument/2006/relationships" xmlns:p="http://schemas.openxmlformats.org/presentationml/2006/main">
+  <p:cSld>
+    <p:bg>
+      <p:bgPr>
+        <a:solidFill>
+          <a:srgbClr val="FFFFFF"/>
+        </a:solidFill>
+        <a:effectLst/>
+      </p:bgPr>
+    </p:bg>
+    <p:spTree>
+      <p:nvGrpSpPr>
+        <p:cNvPr id="1" name=""/>
+        <p:cNvGrpSpPr/>
+        <p:nvPr/>
+      </p:nvGrpSpPr>
+      <p:grpSpPr>
+        <a:xfrm>
+          <a:off x="0" y="0"/>
+          <a:ext cx="0" cy="0"/>
+          <a:chOff x="0" y="0"/>
+          <a:chExt cx="0" cy="0"/>
+        </a:xfrm>
+      </p:grpSpPr>
       <p:sp>
         <p:nvSpPr>
           <p:cNvPr id="2" name="Rectangle 1"/>
@@ -3976,7 +5192,7 @@
               </a:defRPr>
             </a:pPr>
             <a:r>
-              <a:t>5-Year Financial Projections</a:t>
+              <a:t>The Scalability Advantage</a:t>
             </a:r>
           </a:p>
         </p:txBody>
@@ -3990,7 +5206,7 @@
         <p:spPr>
           <a:xfrm>
             <a:off x="731520" y="1097280"/>
-            <a:ext cx="7680960" cy="5303520"/>
+            <a:ext cx="7680960" cy="3703578"/>
           </a:xfrm>
           <a:prstGeom prst="rect">
             <a:avLst/>
@@ -4017,7 +5233,30 @@
               </a:defRPr>
             </a:pPr>
             <a:r>
-              <a:t>Year 1: €275K revenue | €175K profit (64% margin)</a:t>
+              <a:rPr dirty="0"/>
+              <a:t>REUSABLE CORE: </a:t>
+            </a:r>
+            <a:endParaRPr lang="en-US" dirty="0"/>
+          </a:p>
+          <a:p>
+            <a:pPr marL="342900" indent="-342900">
+              <a:spcBef>
+                <a:spcPts val="800"/>
+              </a:spcBef>
+              <a:spcAft>
+                <a:spcPts val="800"/>
+              </a:spcAft>
+              <a:buFont typeface="Arial" panose="020B0604020202020204" pitchFamily="34" charset="0"/>
+              <a:buChar char="•"/>
+              <a:defRPr sz="2400">
+                <a:solidFill>
+                  <a:srgbClr val="333333"/>
+                </a:solidFill>
+              </a:defRPr>
+            </a:pPr>
+            <a:r>
+              <a:rPr dirty="0"/>
+              <a:t>Screenshot overlay + OCR + metadata works across ALL industries</a:t>
             </a:r>
           </a:p>
           <a:p>
@@ -4035,7 +5274,30 @@
               </a:defRPr>
             </a:pPr>
             <a:r>
-              <a:t>Year 2: €850K revenue | €600K profit (71% margin)</a:t>
+              <a:rPr dirty="0"/>
+              <a:t>FASTER EXPANSION: </a:t>
+            </a:r>
+            <a:endParaRPr lang="en-US" dirty="0"/>
+          </a:p>
+          <a:p>
+            <a:pPr marL="342900" indent="-342900">
+              <a:spcBef>
+                <a:spcPts val="800"/>
+              </a:spcBef>
+              <a:spcAft>
+                <a:spcPts val="800"/>
+              </a:spcAft>
+              <a:buFont typeface="Arial" panose="020B0604020202020204" pitchFamily="34" charset="0"/>
+              <a:buChar char="•"/>
+              <a:defRPr sz="2400">
+                <a:solidFill>
+                  <a:srgbClr val="333333"/>
+                </a:solidFill>
+              </a:defRPr>
+            </a:pPr>
+            <a:r>
+              <a:rPr dirty="0"/>
+              <a:t>Each new vertical takes 4-6 weeks (30-40% code changes)</a:t>
             </a:r>
           </a:p>
           <a:p>
@@ -4053,17 +5315,21 @@
               </a:defRPr>
             </a:pPr>
             <a:r>
-              <a:t>Year 3: €2.1M revenue | €1.65M profit (79% margin)</a:t>
-            </a:r>
-          </a:p>
-          <a:p>
-            <a:pPr>
-              <a:spcBef>
-                <a:spcPts val="800"/>
-              </a:spcBef>
-              <a:spcAft>
-                <a:spcPts val="800"/>
-              </a:spcAft>
+              <a:rPr dirty="0"/>
+              <a:t>MARGINAL COSTS: </a:t>
+            </a:r>
+            <a:endParaRPr lang="en-US" dirty="0"/>
+          </a:p>
+          <a:p>
+            <a:pPr marL="342900" indent="-342900">
+              <a:spcBef>
+                <a:spcPts val="800"/>
+              </a:spcBef>
+              <a:spcAft>
+                <a:spcPts val="800"/>
+              </a:spcAft>
+              <a:buFont typeface="Arial" panose="020B0604020202020204" pitchFamily="34" charset="0"/>
+              <a:buChar char="•"/>
               <a:defRPr sz="2400">
                 <a:solidFill>
                   <a:srgbClr val="333333"/>
@@ -4071,25 +5337,8 @@
               </a:defRPr>
             </a:pPr>
             <a:r>
-              <a:t>Year 4: €4M revenue | €3.3M profit (83% margin)</a:t>
-            </a:r>
-          </a:p>
-          <a:p>
-            <a:pPr>
-              <a:spcBef>
-                <a:spcPts val="800"/>
-              </a:spcBef>
-              <a:spcAft>
-                <a:spcPts val="800"/>
-              </a:spcAft>
-              <a:defRPr sz="2400">
-                <a:solidFill>
-                  <a:srgbClr val="333333"/>
-                </a:solidFill>
-              </a:defRPr>
-            </a:pPr>
-            <a:r>
-              <a:t>Year 5: €8M+ revenue | 85%+ margin (data licensing focus)</a:t>
+              <a:rPr dirty="0"/>
+              <a:t>Infrastructure scales logarithmically, not linearly</a:t>
             </a:r>
           </a:p>
         </p:txBody>
@@ -4102,8 +5351,8 @@
 </p:sld>
 </file>
 
-<file path=ppt/slides/slide14.xml><?xml version="1.0" encoding="utf-8"?>
-<p:sld xmlns:a="http://schemas.openxmlformats.org/drawingml/2006/main" xmlns:p="http://schemas.openxmlformats.org/presentationml/2006/main" xmlns:r="http://schemas.openxmlformats.org/officeDocument/2006/relationships">
+<file path=ppt/slides/slide8.xml><?xml version="1.0" encoding="utf-8"?>
+<p:sld xmlns:a="http://schemas.openxmlformats.org/drawingml/2006/main" xmlns:r="http://schemas.openxmlformats.org/officeDocument/2006/relationships" xmlns:p="http://schemas.openxmlformats.org/presentationml/2006/main">
   <p:cSld>
     <p:bg>
       <p:bgPr>
@@ -4119,7 +5368,14 @@
         <p:cNvGrpSpPr/>
         <p:nvPr/>
       </p:nvGrpSpPr>
-      <p:grpSpPr/>
+      <p:grpSpPr>
+        <a:xfrm>
+          <a:off x="0" y="0"/>
+          <a:ext cx="0" cy="0"/>
+          <a:chOff x="0" y="0"/>
+          <a:chExt cx="0" cy="0"/>
+        </a:xfrm>
+      </p:grpSpPr>
       <p:sp>
         <p:nvSpPr>
           <p:cNvPr id="2" name="Rectangle 1"/>
@@ -4175,7 +5431,7 @@
               </a:defRPr>
             </a:pPr>
             <a:r>
-              <a:t>6-Month Implementation Roadmap</a:t>
+              <a:t>Go-to-Market Strategy</a:t>
             </a:r>
           </a:p>
         </p:txBody>
@@ -4189,7 +5445,7 @@
         <p:spPr>
           <a:xfrm>
             <a:off x="731520" y="1097280"/>
-            <a:ext cx="7680960" cy="5303520"/>
+            <a:ext cx="7680960" cy="5016758"/>
           </a:xfrm>
           <a:prstGeom prst="rect">
             <a:avLst/>
@@ -4216,7 +5472,8 @@
               </a:defRPr>
             </a:pPr>
             <a:r>
-              <a:t>Month 1: Polish retail MVP, prepare for beta (2-3 pilot customers)</a:t>
+              <a:rPr dirty="0"/>
+              <a:t>Phase 1 (Months 1-3): Refine retail, land 10-15 customers</a:t>
             </a:r>
           </a:p>
           <a:p>
@@ -4234,7 +5491,8 @@
               </a:defRPr>
             </a:pPr>
             <a:r>
-              <a:t>Month 2: Real estate module dev + 5-10 retail customers</a:t>
+              <a:rPr dirty="0"/>
+              <a:t>  =&gt; Prove unit economics, build case studies</a:t>
             </a:r>
           </a:p>
           <a:p>
@@ -4252,7 +5510,8 @@
               </a:defRPr>
             </a:pPr>
             <a:r>
-              <a:t>Month 3: Launch real estate beta + 20 retail customers</a:t>
+              <a:rPr dirty="0"/>
+              <a:t>Phase 2 (Months 4-6): Launch real estate, expand retail to 30+ customers</a:t>
             </a:r>
           </a:p>
           <a:p>
@@ -4270,7 +5529,8 @@
               </a:defRPr>
             </a:pPr>
             <a:r>
-              <a:t>Month 4: Automotive module dev + Enterprise tier (€5K+/month)</a:t>
+              <a:rPr dirty="0"/>
+              <a:t>  =&gt; Bundle offer: Retail + Real Estate (25% discount lock-in)</a:t>
             </a:r>
           </a:p>
           <a:p>
@@ -4288,7 +5548,8 @@
               </a:defRPr>
             </a:pPr>
             <a:r>
-              <a:t>Month 5: Automotive launch + Hospitality dev + multi-industry customers</a:t>
+              <a:rPr dirty="0"/>
+              <a:t>Phase 3 (Months 7-12): Add automotive, target SMBs &amp; mid-market</a:t>
             </a:r>
           </a:p>
           <a:p>
@@ -4306,7 +5567,27 @@
               </a:defRPr>
             </a:pPr>
             <a:r>
-              <a:t>Month 6: 3 verticals live, 50+ customers, €300K+ MRR target</a:t>
+              <a:rPr dirty="0"/>
+              <a:t>  =&gt; Multi-industry customers get enterprise pricing (€5K+/month)</a:t>
+            </a:r>
+          </a:p>
+          <a:p>
+            <a:pPr>
+              <a:spcBef>
+                <a:spcPts val="800"/>
+              </a:spcBef>
+              <a:spcAft>
+                <a:spcPts val="800"/>
+              </a:spcAft>
+              <a:defRPr sz="2400">
+                <a:solidFill>
+                  <a:srgbClr val="333333"/>
+                </a:solidFill>
+              </a:defRPr>
+            </a:pPr>
+            <a:r>
+              <a:rPr dirty="0"/>
+              <a:t>Phase 4 (Year 2): Launch data licensing &amp; analytics SaaS</a:t>
             </a:r>
           </a:p>
         </p:txBody>
@@ -4319,108 +5600,8 @@
 </p:sld>
 </file>
 
-<file path=ppt/slides/slide15.xml><?xml version="1.0" encoding="utf-8"?>
-<p:sld xmlns:a="http://schemas.openxmlformats.org/drawingml/2006/main" xmlns:p="http://schemas.openxmlformats.org/presentationml/2006/main" xmlns:r="http://schemas.openxmlformats.org/officeDocument/2006/relationships">
-  <p:cSld>
-    <p:bg>
-      <p:bgPr>
-        <a:solidFill>
-          <a:srgbClr val="1F4E79"/>
-        </a:solidFill>
-        <a:effectLst/>
-      </p:bgPr>
-    </p:bg>
-    <p:spTree>
-      <p:nvGrpSpPr>
-        <p:cNvPr id="1" name=""/>
-        <p:cNvGrpSpPr/>
-        <p:nvPr/>
-      </p:nvGrpSpPr>
-      <p:grpSpPr/>
-      <p:sp>
-        <p:nvSpPr>
-          <p:cNvPr id="2" name="TextBox 1"/>
-          <p:cNvSpPr txBox="1"/>
-          <p:nvPr/>
-        </p:nvSpPr>
-        <p:spPr>
-          <a:xfrm>
-            <a:off x="457200" y="2286000"/>
-            <a:ext cx="8229600" cy="1371600"/>
-          </a:xfrm>
-          <a:prstGeom prst="rect">
-            <a:avLst/>
-          </a:prstGeom>
-          <a:noFill/>
-        </p:spPr>
-        <p:txBody>
-          <a:bodyPr wrap="square">
-            <a:spAutoFit/>
-          </a:bodyPr>
-          <a:lstStyle/>
-          <a:p>
-            <a:pPr algn="ctr">
-              <a:defRPr sz="6600" b="1">
-                <a:solidFill>
-                  <a:srgbClr val="FFFFFF"/>
-                </a:solidFill>
-              </a:defRPr>
-            </a:pPr>
-            <a:r>
-              <a:t>Transform Data Collection into Revenue</a:t>
-            </a:r>
-          </a:p>
-        </p:txBody>
-      </p:sp>
-      <p:sp>
-        <p:nvSpPr>
-          <p:cNvPr id="3" name="TextBox 2"/>
-          <p:cNvSpPr txBox="1"/>
-          <p:nvPr/>
-        </p:nvSpPr>
-        <p:spPr>
-          <a:xfrm>
-            <a:off x="457200" y="3840480"/>
-            <a:ext cx="8229600" cy="1828800"/>
-          </a:xfrm>
-          <a:prstGeom prst="rect">
-            <a:avLst/>
-          </a:prstGeom>
-          <a:noFill/>
-        </p:spPr>
-        <p:txBody>
-          <a:bodyPr wrap="square">
-            <a:spAutoFit/>
-          </a:bodyPr>
-          <a:lstStyle/>
-          <a:p>
-            <a:pPr algn="ctr">
-              <a:defRPr sz="3200">
-                <a:solidFill>
-                  <a:srgbClr val="4F81BD"/>
-                </a:solidFill>
-              </a:defRPr>
-            </a:pPr>
-            <a:r>
-              <a:t>From €7,630 cost savings to</a:t>
-            </a:r>
-            <a:br/>
-            <a:r>
-              <a:t>€8M+ recurring revenue in 5 years</a:t>
-            </a:r>
-          </a:p>
-        </p:txBody>
-      </p:sp>
-    </p:spTree>
-  </p:cSld>
-  <p:clrMapOvr>
-    <a:masterClrMapping/>
-  </p:clrMapOvr>
-</p:sld>
-</file>
-
-<file path=ppt/slides/slide2.xml><?xml version="1.0" encoding="utf-8"?>
-<p:sld xmlns:a="http://schemas.openxmlformats.org/drawingml/2006/main" xmlns:p="http://schemas.openxmlformats.org/presentationml/2006/main" xmlns:r="http://schemas.openxmlformats.org/officeDocument/2006/relationships">
+<file path=ppt/slides/slide9.xml><?xml version="1.0" encoding="utf-8"?>
+<p:sld xmlns:a="http://schemas.openxmlformats.org/drawingml/2006/main" xmlns:r="http://schemas.openxmlformats.org/officeDocument/2006/relationships" xmlns:p="http://schemas.openxmlformats.org/presentationml/2006/main">
   <p:cSld>
     <p:bg>
       <p:bgPr>
@@ -4436,7 +5617,14 @@
         <p:cNvGrpSpPr/>
         <p:nvPr/>
       </p:nvGrpSpPr>
-      <p:grpSpPr/>
+      <p:grpSpPr>
+        <a:xfrm>
+          <a:off x="0" y="0"/>
+          <a:ext cx="0" cy="0"/>
+          <a:chOff x="0" y="0"/>
+          <a:chExt cx="0" cy="0"/>
+        </a:xfrm>
+      </p:grpSpPr>
       <p:sp>
         <p:nvSpPr>
           <p:cNvPr id="2" name="Rectangle 1"/>
@@ -4492,7 +5680,7 @@
               </a:defRPr>
             </a:pPr>
             <a:r>
-              <a:t>The Market Problem</a:t>
+              <a:t>Why Snipper Tool Wins</a:t>
             </a:r>
           </a:p>
         </p:txBody>
@@ -4506,7 +5694,7 @@
         <p:spPr>
           <a:xfrm>
             <a:off x="731520" y="1097280"/>
-            <a:ext cx="7680960" cy="5303520"/>
+            <a:ext cx="7680960" cy="4565352"/>
           </a:xfrm>
           <a:prstGeom prst="rect">
             <a:avLst/>
@@ -4533,7 +5721,12 @@
               </a:defRPr>
             </a:pPr>
             <a:r>
-              <a:t>Market research is SLOW: Manual data collection takes 15-20 hours per dataset</a:t>
+              <a:rPr sz="2800" b="1" dirty="0"/>
+              <a:t>Speed</a:t>
+            </a:r>
+            <a:r>
+              <a:rPr dirty="0"/>
+              <a:t>: 5x faster than manual (5.07h vs 19h/week)</a:t>
             </a:r>
           </a:p>
           <a:p>
@@ -4551,7 +5744,12 @@
               </a:defRPr>
             </a:pPr>
             <a:r>
-              <a:t>Web scraping is RISKY: Blocked by anti-bot measures, legal/GDPR concerns</a:t>
+              <a:rPr sz="2800" b="1" dirty="0"/>
+              <a:t>Accuracy</a:t>
+            </a:r>
+            <a:r>
+              <a:rPr dirty="0"/>
+              <a:t>: 100% validated data (vs 85% manual, 10% scraping)</a:t>
             </a:r>
           </a:p>
           <a:p>
@@ -4569,7 +5767,12 @@
               </a:defRPr>
             </a:pPr>
             <a:r>
-              <a:t>Market data is EXPENSIVE: Analyst fees + licensing costs €500-1,000+ per month</a:t>
+              <a:rPr sz="3200" b="1" dirty="0"/>
+              <a:t>Legal</a:t>
+            </a:r>
+            <a:r>
+              <a:rPr dirty="0"/>
+              <a:t>: Zero IP bans, no GDPR violations (vs scraping risks)</a:t>
             </a:r>
           </a:p>
           <a:p>
@@ -4587,7 +5790,12 @@
               </a:defRPr>
             </a:pPr>
             <a:r>
-              <a:t>Data is STALE: By the time insights arrive, markets have moved</a:t>
+              <a:rPr sz="3200" b="1" dirty="0"/>
+              <a:t>Cost: </a:t>
+            </a:r>
+            <a:r>
+              <a:rPr dirty="0"/>
+              <a:t>€7,630/year operational (vs €45.5K manual or €235K scraping)</a:t>
             </a:r>
           </a:p>
           <a:p>
@@ -4605,118 +5813,14 @@
               </a:defRPr>
             </a:pPr>
             <a:r>
-              <a:t>SOLUTION: Semi-automatic visual intelligence - fast, accurate, legal &amp; scalable</a:t>
-            </a:r>
-          </a:p>
-        </p:txBody>
-      </p:sp>
-    </p:spTree>
-  </p:cSld>
-  <p:clrMapOvr>
-    <a:masterClrMapping/>
-  </p:clrMapOvr>
-</p:sld>
-</file>
-
-<file path=ppt/slides/slide3.xml><?xml version="1.0" encoding="utf-8"?>
-<p:sld xmlns:a="http://schemas.openxmlformats.org/drawingml/2006/main" xmlns:p="http://schemas.openxmlformats.org/presentationml/2006/main" xmlns:r="http://schemas.openxmlformats.org/officeDocument/2006/relationships">
-  <p:cSld>
-    <p:bg>
-      <p:bgPr>
-        <a:solidFill>
-          <a:srgbClr val="FFFFFF"/>
-        </a:solidFill>
-        <a:effectLst/>
-      </p:bgPr>
-    </p:bg>
-    <p:spTree>
-      <p:nvGrpSpPr>
-        <p:cNvPr id="1" name=""/>
-        <p:cNvGrpSpPr/>
-        <p:nvPr/>
-      </p:nvGrpSpPr>
-      <p:grpSpPr/>
-      <p:sp>
-        <p:nvSpPr>
-          <p:cNvPr id="2" name="Rectangle 1"/>
-          <p:cNvSpPr/>
-          <p:nvPr/>
-        </p:nvSpPr>
-        <p:spPr>
-          <a:xfrm>
-            <a:off x="0" y="0"/>
-            <a:ext cx="9144000" cy="731520"/>
-          </a:xfrm>
-          <a:prstGeom prst="rect">
-            <a:avLst/>
-          </a:prstGeom>
-          <a:solidFill>
-            <a:srgbClr val="1F4E79"/>
-          </a:solidFill>
-          <a:ln>
-            <a:solidFill>
-              <a:srgbClr val="1F4E79"/>
-            </a:solidFill>
-          </a:ln>
-        </p:spPr>
-        <p:style>
-          <a:lnRef idx="1">
-            <a:schemeClr val="accent1"/>
-          </a:lnRef>
-          <a:fillRef idx="3">
-            <a:schemeClr val="accent1"/>
-          </a:fillRef>
-          <a:effectRef idx="2">
-            <a:schemeClr val="accent1"/>
-          </a:effectRef>
-          <a:fontRef idx="minor">
-            <a:schemeClr val="lt1"/>
-          </a:fontRef>
-        </p:style>
-        <p:txBody>
-          <a:bodyPr rtlCol="0" anchor="ctr"/>
-          <a:lstStyle/>
-          <a:p>
-            <a:pPr algn="ctr">
-              <a:spcBef>
-                <a:spcPts val="1000"/>
-              </a:spcBef>
-              <a:spcAft>
-                <a:spcPts val="1000"/>
-              </a:spcAft>
-              <a:defRPr sz="4800" b="1">
-                <a:solidFill>
-                  <a:srgbClr val="FFFFFF"/>
-                </a:solidFill>
-              </a:defRPr>
-            </a:pPr>
-            <a:r>
-              <a:t>How Snipper Tool Works: 3-Step Process</a:t>
-            </a:r>
-          </a:p>
-        </p:txBody>
-      </p:sp>
-      <p:sp>
-        <p:nvSpPr>
-          <p:cNvPr id="3" name="TextBox 2"/>
-          <p:cNvSpPr txBox="1"/>
-          <p:nvPr/>
-        </p:nvSpPr>
-        <p:spPr>
-          <a:xfrm>
-            <a:off x="731520" y="1097280"/>
-            <a:ext cx="7680960" cy="5303520"/>
-          </a:xfrm>
-          <a:prstGeom prst="rect">
-            <a:avLst/>
-          </a:prstGeom>
-          <a:noFill/>
-        </p:spPr>
-        <p:txBody>
-          <a:bodyPr wrap="square">
-            <a:spAutoFit/>
-          </a:bodyPr>
-          <a:lstStyle/>
+              <a:rPr sz="3200" b="1" dirty="0"/>
+              <a:t>Scalable: </a:t>
+            </a:r>
+            <a:r>
+              <a:rPr dirty="0"/>
+              <a:t>Add stores/products without adding people</a:t>
+            </a:r>
+          </a:p>
           <a:p>
             <a:pPr>
               <a:spcBef>
@@ -4732,1650 +5836,8 @@
               </a:defRPr>
             </a:pPr>
             <a:r>
-              <a:t>1. CAPTURE: User takes screenshot with smart overlay (Alt+C hotkey)</a:t>
-            </a:r>
-          </a:p>
-          <a:p>
-            <a:pPr>
-              <a:spcBef>
-                <a:spcPts val="800"/>
-              </a:spcBef>
-              <a:spcAft>
-                <a:spcPts val="800"/>
-              </a:spcAft>
-              <a:defRPr sz="2400">
-                <a:solidFill>
-                  <a:srgbClr val="333333"/>
-                </a:solidFill>
-              </a:defRPr>
-            </a:pPr>
-            <a:r>
-              <a:t>2. DETECT: AI-powered OCR automatically extracts prices &amp; product data</a:t>
-            </a:r>
-          </a:p>
-          <a:p>
-            <a:pPr>
-              <a:spcBef>
-                <a:spcPts val="800"/>
-              </a:spcBef>
-              <a:spcAft>
-                <a:spcPts val="800"/>
-              </a:spcAft>
-              <a:defRPr sz="2400">
-                <a:solidFill>
-                  <a:srgbClr val="333333"/>
-                </a:solidFill>
-              </a:defRPr>
-            </a:pPr>
-            <a:r>
-              <a:t>3. ANALYZE: Data exported as structured JSON for immediate analysis</a:t>
-            </a:r>
-          </a:p>
-          <a:p>
-            <a:pPr>
-              <a:spcBef>
-                <a:spcPts val="800"/>
-              </a:spcBef>
-              <a:spcAft>
-                <a:spcPts val="800"/>
-              </a:spcAft>
-              <a:defRPr sz="2400">
-                <a:solidFill>
-                  <a:srgbClr val="333333"/>
-                </a:solidFill>
-              </a:defRPr>
-            </a:pPr>
-          </a:p>
-          <a:p>
-            <a:pPr>
-              <a:spcBef>
-                <a:spcPts val="800"/>
-              </a:spcBef>
-              <a:spcAft>
-                <a:spcPts val="800"/>
-              </a:spcAft>
-              <a:defRPr sz="2400">
-                <a:solidFill>
-                  <a:srgbClr val="333333"/>
-                </a:solidFill>
-              </a:defRPr>
-            </a:pPr>
-            <a:r>
-              <a:t>TIME: 40 seconds per product vs 2 minutes manual (5x faster)</a:t>
-            </a:r>
-          </a:p>
-          <a:p>
-            <a:pPr>
-              <a:spcBef>
-                <a:spcPts val="800"/>
-              </a:spcBef>
-              <a:spcAft>
-                <a:spcPts val="800"/>
-              </a:spcAft>
-              <a:defRPr sz="2400">
-                <a:solidFill>
-                  <a:srgbClr val="333333"/>
-                </a:solidFill>
-              </a:defRPr>
-            </a:pPr>
-            <a:r>
-              <a:t>ACCURACY: 100% validated data ready for analytics &amp; reporting</a:t>
-            </a:r>
-          </a:p>
-        </p:txBody>
-      </p:sp>
-    </p:spTree>
-  </p:cSld>
-  <p:clrMapOvr>
-    <a:masterClrMapping/>
-  </p:clrMapOvr>
-</p:sld>
-</file>
-
-<file path=ppt/slides/slide4.xml><?xml version="1.0" encoding="utf-8"?>
-<p:sld xmlns:a="http://schemas.openxmlformats.org/drawingml/2006/main" xmlns:p="http://schemas.openxmlformats.org/presentationml/2006/main" xmlns:r="http://schemas.openxmlformats.org/officeDocument/2006/relationships">
-  <p:cSld>
-    <p:bg>
-      <p:bgPr>
-        <a:solidFill>
-          <a:srgbClr val="FFFFFF"/>
-        </a:solidFill>
-        <a:effectLst/>
-      </p:bgPr>
-    </p:bg>
-    <p:spTree>
-      <p:nvGrpSpPr>
-        <p:cNvPr id="1" name=""/>
-        <p:cNvGrpSpPr/>
-        <p:nvPr/>
-      </p:nvGrpSpPr>
-      <p:grpSpPr/>
-      <p:sp>
-        <p:nvSpPr>
-          <p:cNvPr id="2" name="Rectangle 1"/>
-          <p:cNvSpPr/>
-          <p:nvPr/>
-        </p:nvSpPr>
-        <p:spPr>
-          <a:xfrm>
-            <a:off x="0" y="0"/>
-            <a:ext cx="9144000" cy="731520"/>
-          </a:xfrm>
-          <a:prstGeom prst="rect">
-            <a:avLst/>
-          </a:prstGeom>
-          <a:solidFill>
-            <a:srgbClr val="1F4E79"/>
-          </a:solidFill>
-          <a:ln>
-            <a:solidFill>
-              <a:srgbClr val="1F4E79"/>
-            </a:solidFill>
-          </a:ln>
-        </p:spPr>
-        <p:style>
-          <a:lnRef idx="1">
-            <a:schemeClr val="accent1"/>
-          </a:lnRef>
-          <a:fillRef idx="3">
-            <a:schemeClr val="accent1"/>
-          </a:fillRef>
-          <a:effectRef idx="2">
-            <a:schemeClr val="accent1"/>
-          </a:effectRef>
-          <a:fontRef idx="minor">
-            <a:schemeClr val="lt1"/>
-          </a:fontRef>
-        </p:style>
-        <p:txBody>
-          <a:bodyPr rtlCol="0" anchor="ctr"/>
-          <a:lstStyle/>
-          <a:p>
-            <a:pPr algn="ctr">
-              <a:spcBef>
-                <a:spcPts val="1000"/>
-              </a:spcBef>
-              <a:spcAft>
-                <a:spcPts val="1000"/>
-              </a:spcAft>
-              <a:defRPr sz="4800" b="1">
-                <a:solidFill>
-                  <a:srgbClr val="FFFFFF"/>
-                </a:solidFill>
-              </a:defRPr>
-            </a:pPr>
-            <a:r>
-              <a:t>Financial Case: Supermarket Monitoring</a:t>
-            </a:r>
-          </a:p>
-        </p:txBody>
-      </p:sp>
-      <p:sp>
-        <p:nvSpPr>
-          <p:cNvPr id="3" name="TextBox 2"/>
-          <p:cNvSpPr txBox="1"/>
-          <p:nvPr/>
-        </p:nvSpPr>
-        <p:spPr>
-          <a:xfrm>
-            <a:off x="731520" y="1097280"/>
-            <a:ext cx="7680960" cy="5303520"/>
-          </a:xfrm>
-          <a:prstGeom prst="rect">
-            <a:avLst/>
-          </a:prstGeom>
-          <a:noFill/>
-        </p:spPr>
-        <p:txBody>
-          <a:bodyPr wrap="square">
-            <a:spAutoFit/>
-          </a:bodyPr>
-          <a:lstStyle/>
-          <a:p>
-            <a:pPr>
-              <a:spcBef>
-                <a:spcPts val="800"/>
-              </a:spcBef>
-              <a:spcAft>
-                <a:spcPts val="800"/>
-              </a:spcAft>
-              <a:defRPr sz="2400">
-                <a:solidFill>
-                  <a:srgbClr val="333333"/>
-                </a:solidFill>
-              </a:defRPr>
-            </a:pPr>
-            <a:r>
-              <a:t>Weekly Collection: 500 products across 5 stores (€146.74/week = €7,630/year)</a:t>
-            </a:r>
-          </a:p>
-          <a:p>
-            <a:pPr>
-              <a:spcBef>
-                <a:spcPts val="800"/>
-              </a:spcBef>
-              <a:spcAft>
-                <a:spcPts val="800"/>
-              </a:spcAft>
-              <a:defRPr sz="2400">
-                <a:solidFill>
-                  <a:srgbClr val="333333"/>
-                </a:solidFill>
-              </a:defRPr>
-            </a:pPr>
-            <a:r>
-              <a:t>Manual Alternative: Would cost €45,500/year (€875/week)</a:t>
-            </a:r>
-          </a:p>
-          <a:p>
-            <a:pPr>
-              <a:spcBef>
-                <a:spcPts val="800"/>
-              </a:spcBef>
-              <a:spcAft>
-                <a:spcPts val="800"/>
-              </a:spcAft>
-              <a:defRPr sz="2400">
-                <a:solidFill>
-                  <a:srgbClr val="333333"/>
-                </a:solidFill>
-              </a:defRPr>
-            </a:pPr>
-            <a:r>
-              <a:t>ANNUAL SAVINGS: €37,870 per customer (83% cost reduction)</a:t>
-            </a:r>
-          </a:p>
-          <a:p>
-            <a:pPr>
-              <a:spcBef>
-                <a:spcPts val="800"/>
-              </a:spcBef>
-              <a:spcAft>
-                <a:spcPts val="800"/>
-              </a:spcAft>
-              <a:defRPr sz="2400">
-                <a:solidFill>
-                  <a:srgbClr val="333333"/>
-                </a:solidFill>
-              </a:defRPr>
-            </a:pPr>
-          </a:p>
-          <a:p>
-            <a:pPr>
-              <a:spcBef>
-                <a:spcPts val="800"/>
-              </a:spcBef>
-              <a:spcAft>
-                <a:spcPts val="800"/>
-              </a:spcAft>
-              <a:defRPr sz="2400">
-                <a:solidFill>
-                  <a:srgbClr val="333333"/>
-                </a:solidFill>
-              </a:defRPr>
-            </a:pPr>
-            <a:r>
-              <a:t>YOUR REVENUE: Sell for €200-400/month = €2,400-4,800/year per customer</a:t>
-            </a:r>
-          </a:p>
-          <a:p>
-            <a:pPr>
-              <a:spcBef>
-                <a:spcPts val="800"/>
-              </a:spcBef>
-              <a:spcAft>
-                <a:spcPts val="800"/>
-              </a:spcAft>
-              <a:defRPr sz="2400">
-                <a:solidFill>
-                  <a:srgbClr val="333333"/>
-                </a:solidFill>
-              </a:defRPr>
-            </a:pPr>
-            <a:r>
-              <a:t>Gross margin: 68-84% (You get €1,600-3,000 of the €7,630 savings)</a:t>
-            </a:r>
-          </a:p>
-        </p:txBody>
-      </p:sp>
-    </p:spTree>
-  </p:cSld>
-  <p:clrMapOvr>
-    <a:masterClrMapping/>
-  </p:clrMapOvr>
-</p:sld>
-</file>
-
-<file path=ppt/slides/slide5.xml><?xml version="1.0" encoding="utf-8"?>
-<p:sld xmlns:a="http://schemas.openxmlformats.org/drawingml/2006/main" xmlns:p="http://schemas.openxmlformats.org/presentationml/2006/main" xmlns:r="http://schemas.openxmlformats.org/officeDocument/2006/relationships">
-  <p:cSld>
-    <p:bg>
-      <p:bgPr>
-        <a:solidFill>
-          <a:srgbClr val="FFFFFF"/>
-        </a:solidFill>
-        <a:effectLst/>
-      </p:bgPr>
-    </p:bg>
-    <p:spTree>
-      <p:nvGrpSpPr>
-        <p:cNvPr id="1" name=""/>
-        <p:cNvGrpSpPr/>
-        <p:nvPr/>
-      </p:nvGrpSpPr>
-      <p:grpSpPr/>
-      <p:sp>
-        <p:nvSpPr>
-          <p:cNvPr id="2" name="Rectangle 1"/>
-          <p:cNvSpPr/>
-          <p:nvPr/>
-        </p:nvSpPr>
-        <p:spPr>
-          <a:xfrm>
-            <a:off x="0" y="0"/>
-            <a:ext cx="9144000" cy="731520"/>
-          </a:xfrm>
-          <a:prstGeom prst="rect">
-            <a:avLst/>
-          </a:prstGeom>
-          <a:solidFill>
-            <a:srgbClr val="1F4E79"/>
-          </a:solidFill>
-          <a:ln>
-            <a:solidFill>
-              <a:srgbClr val="1F4E79"/>
-            </a:solidFill>
-          </a:ln>
-        </p:spPr>
-        <p:style>
-          <a:lnRef idx="1">
-            <a:schemeClr val="accent1"/>
-          </a:lnRef>
-          <a:fillRef idx="3">
-            <a:schemeClr val="accent1"/>
-          </a:fillRef>
-          <a:effectRef idx="2">
-            <a:schemeClr val="accent1"/>
-          </a:effectRef>
-          <a:fontRef idx="minor">
-            <a:schemeClr val="lt1"/>
-          </a:fontRef>
-        </p:style>
-        <p:txBody>
-          <a:bodyPr rtlCol="0" anchor="ctr"/>
-          <a:lstStyle/>
-          <a:p>
-            <a:pPr algn="ctr">
-              <a:spcBef>
-                <a:spcPts val="1000"/>
-              </a:spcBef>
-              <a:spcAft>
-                <a:spcPts val="1000"/>
-              </a:spcAft>
-              <a:defRPr sz="4800" b="1">
-                <a:solidFill>
-                  <a:srgbClr val="FFFFFF"/>
-                </a:solidFill>
-              </a:defRPr>
-            </a:pPr>
-            <a:r>
-              <a:t>3-Stream Revenue Model</a:t>
-            </a:r>
-          </a:p>
-        </p:txBody>
-      </p:sp>
-      <p:sp>
-        <p:nvSpPr>
-          <p:cNvPr id="3" name="TextBox 2"/>
-          <p:cNvSpPr txBox="1"/>
-          <p:nvPr/>
-        </p:nvSpPr>
-        <p:spPr>
-          <a:xfrm>
-            <a:off x="731520" y="1097280"/>
-            <a:ext cx="7680960" cy="5303520"/>
-          </a:xfrm>
-          <a:prstGeom prst="rect">
-            <a:avLst/>
-          </a:prstGeom>
-          <a:noFill/>
-        </p:spPr>
-        <p:txBody>
-          <a:bodyPr wrap="square">
-            <a:spAutoFit/>
-          </a:bodyPr>
-          <a:lstStyle/>
-          <a:p>
-            <a:pPr>
-              <a:spcBef>
-                <a:spcPts val="800"/>
-              </a:spcBef>
-              <a:spcAft>
-                <a:spcPts val="800"/>
-              </a:spcAft>
-              <a:defRPr sz="2400">
-                <a:solidFill>
-                  <a:srgbClr val="333333"/>
-                </a:solidFill>
-              </a:defRPr>
-            </a:pPr>
-            <a:r>
-              <a:t>Stream 1: SaaS Subscriptions</a:t>
-            </a:r>
-          </a:p>
-          <a:p>
-            <a:pPr>
-              <a:spcBef>
-                <a:spcPts val="800"/>
-              </a:spcBef>
-              <a:spcAft>
-                <a:spcPts val="800"/>
-              </a:spcAft>
-              <a:defRPr sz="2400">
-                <a:solidFill>
-                  <a:srgbClr val="333333"/>
-                </a:solidFill>
-              </a:defRPr>
-            </a:pPr>
-            <a:r>
-              <a:t>  € €50-200/month: Solo analyst (1 store, 100 products/week)</a:t>
-            </a:r>
-          </a:p>
-          <a:p>
-            <a:pPr>
-              <a:spcBef>
-                <a:spcPts val="800"/>
-              </a:spcBef>
-              <a:spcAft>
-                <a:spcPts val="800"/>
-              </a:spcAft>
-              <a:defRPr sz="2400">
-                <a:solidFill>
-                  <a:srgbClr val="333333"/>
-                </a:solidFill>
-              </a:defRPr>
-            </a:pPr>
-            <a:r>
-              <a:t>  € €200-500/month: Enterprise tier (5+ stores, 1000+ products/week)</a:t>
-            </a:r>
-          </a:p>
-          <a:p>
-            <a:pPr>
-              <a:spcBef>
-                <a:spcPts val="800"/>
-              </a:spcBef>
-              <a:spcAft>
-                <a:spcPts val="800"/>
-              </a:spcAft>
-              <a:defRPr sz="2400">
-                <a:solidFill>
-                  <a:srgbClr val="333333"/>
-                </a:solidFill>
-              </a:defRPr>
-            </a:pPr>
-          </a:p>
-          <a:p>
-            <a:pPr>
-              <a:spcBef>
-                <a:spcPts val="800"/>
-              </a:spcBef>
-              <a:spcAft>
-                <a:spcPts val="800"/>
-              </a:spcAft>
-              <a:defRPr sz="2400">
-                <a:solidFill>
-                  <a:srgbClr val="333333"/>
-                </a:solidFill>
-              </a:defRPr>
-            </a:pPr>
-            <a:r>
-              <a:t>Stream 2: Data Licensing - €500-5,000/month for aggregated datasets</a:t>
-            </a:r>
-          </a:p>
-          <a:p>
-            <a:pPr>
-              <a:spcBef>
-                <a:spcPts val="800"/>
-              </a:spcBef>
-              <a:spcAft>
-                <a:spcPts val="800"/>
-              </a:spcAft>
-              <a:defRPr sz="2400">
-                <a:solidFill>
-                  <a:srgbClr val="333333"/>
-                </a:solidFill>
-              </a:defRPr>
-            </a:pPr>
-            <a:r>
-              <a:t>Stream 3: Consulting - €5,000-50,000 for custom deployments</a:t>
-            </a:r>
-          </a:p>
-        </p:txBody>
-      </p:sp>
-    </p:spTree>
-  </p:cSld>
-  <p:clrMapOvr>
-    <a:masterClrMapping/>
-  </p:clrMapOvr>
-</p:sld>
-</file>
-
-<file path=ppt/slides/slide6.xml><?xml version="1.0" encoding="utf-8"?>
-<p:sld xmlns:a="http://schemas.openxmlformats.org/drawingml/2006/main" xmlns:p="http://schemas.openxmlformats.org/presentationml/2006/main" xmlns:r="http://schemas.openxmlformats.org/officeDocument/2006/relationships">
-  <p:cSld>
-    <p:bg>
-      <p:bgPr>
-        <a:solidFill>
-          <a:srgbClr val="FFFFFF"/>
-        </a:solidFill>
-        <a:effectLst/>
-      </p:bgPr>
-    </p:bg>
-    <p:spTree>
-      <p:nvGrpSpPr>
-        <p:cNvPr id="1" name=""/>
-        <p:cNvGrpSpPr/>
-        <p:nvPr/>
-      </p:nvGrpSpPr>
-      <p:grpSpPr/>
-      <p:sp>
-        <p:nvSpPr>
-          <p:cNvPr id="2" name="Rectangle 1"/>
-          <p:cNvSpPr/>
-          <p:nvPr/>
-        </p:nvSpPr>
-        <p:spPr>
-          <a:xfrm>
-            <a:off x="0" y="0"/>
-            <a:ext cx="9144000" cy="731520"/>
-          </a:xfrm>
-          <a:prstGeom prst="rect">
-            <a:avLst/>
-          </a:prstGeom>
-          <a:solidFill>
-            <a:srgbClr val="1F4E79"/>
-          </a:solidFill>
-          <a:ln>
-            <a:solidFill>
-              <a:srgbClr val="1F4E79"/>
-            </a:solidFill>
-          </a:ln>
-        </p:spPr>
-        <p:style>
-          <a:lnRef idx="1">
-            <a:schemeClr val="accent1"/>
-          </a:lnRef>
-          <a:fillRef idx="3">
-            <a:schemeClr val="accent1"/>
-          </a:fillRef>
-          <a:effectRef idx="2">
-            <a:schemeClr val="accent1"/>
-          </a:effectRef>
-          <a:fontRef idx="minor">
-            <a:schemeClr val="lt1"/>
-          </a:fontRef>
-        </p:style>
-        <p:txBody>
-          <a:bodyPr rtlCol="0" anchor="ctr"/>
-          <a:lstStyle/>
-          <a:p>
-            <a:pPr algn="ctr">
-              <a:spcBef>
-                <a:spcPts val="1000"/>
-              </a:spcBef>
-              <a:spcAft>
-                <a:spcPts val="1000"/>
-              </a:spcAft>
-              <a:defRPr sz="4800" b="1">
-                <a:solidFill>
-                  <a:srgbClr val="FFFFFF"/>
-                </a:solidFill>
-              </a:defRPr>
-            </a:pPr>
-            <a:r>
-              <a:t>Application #1: Retail Price Monitoring (Current)</a:t>
-            </a:r>
-          </a:p>
-        </p:txBody>
-      </p:sp>
-      <p:sp>
-        <p:nvSpPr>
-          <p:cNvPr id="3" name="TextBox 2"/>
-          <p:cNvSpPr txBox="1"/>
-          <p:nvPr/>
-        </p:nvSpPr>
-        <p:spPr>
-          <a:xfrm>
-            <a:off x="457200" y="1005840"/>
-            <a:ext cx="3931920" cy="5486400"/>
-          </a:xfrm>
-          <a:prstGeom prst="rect">
-            <a:avLst/>
-          </a:prstGeom>
-          <a:noFill/>
-        </p:spPr>
-        <p:txBody>
-          <a:bodyPr wrap="square">
-            <a:spAutoFit/>
-          </a:bodyPr>
-          <a:lstStyle/>
-          <a:p>
-            <a:pPr>
-              <a:spcAft>
-                <a:spcPts val="1200"/>
-              </a:spcAft>
-              <a:defRPr sz="2400" b="1">
-                <a:solidFill>
-                  <a:srgbClr val="4F81BD"/>
-                </a:solidFill>
-              </a:defRPr>
-            </a:pPr>
-            <a:r>
-              <a:t>Market Opportunity</a:t>
-            </a:r>
-          </a:p>
-          <a:p>
-            <a:pPr>
-              <a:spcAft>
-                <a:spcPts val="1000"/>
-              </a:spcAft>
-              <a:defRPr sz="1900">
-                <a:solidFill>
-                  <a:srgbClr val="333333"/>
-                </a:solidFill>
-              </a:defRPr>
-            </a:pPr>
-            <a:r>
-              <a:t>• Target: Supermarket chains, CPG brands, price platforms</a:t>
-            </a:r>
-          </a:p>
-          <a:p>
-            <a:pPr>
-              <a:spcAft>
-                <a:spcPts val="1000"/>
-              </a:spcAft>
-              <a:defRPr sz="1900">
-                <a:solidFill>
-                  <a:srgbClr val="333333"/>
-                </a:solidFill>
-              </a:defRPr>
-            </a:pPr>
-            <a:r>
-              <a:t>• Market: €200M+ in retail analytics annually</a:t>
-            </a:r>
-          </a:p>
-          <a:p>
-            <a:pPr>
-              <a:spcAft>
-                <a:spcPts val="1000"/>
-              </a:spcAft>
-              <a:defRPr sz="1900">
-                <a:solidFill>
-                  <a:srgbClr val="333333"/>
-                </a:solidFill>
-              </a:defRPr>
-            </a:pPr>
-            <a:r>
-              <a:t>• Uses: Competitive pricing, promotions, margins</a:t>
-            </a:r>
-          </a:p>
-          <a:p>
-            <a:pPr>
-              <a:spcAft>
-                <a:spcPts val="1000"/>
-              </a:spcAft>
-              <a:defRPr sz="1900">
-                <a:solidFill>
-                  <a:srgbClr val="333333"/>
-                </a:solidFill>
-              </a:defRPr>
-            </a:pPr>
-            <a:r>
-              <a:t>• Geography: EU-wide (France, Spain, Germany, UK)</a:t>
-            </a:r>
-          </a:p>
-        </p:txBody>
-      </p:sp>
-      <p:sp>
-        <p:nvSpPr>
-          <p:cNvPr id="4" name="TextBox 3"/>
-          <p:cNvSpPr txBox="1"/>
-          <p:nvPr/>
-        </p:nvSpPr>
-        <p:spPr>
-          <a:xfrm>
-            <a:off x="4754880" y="1005840"/>
-            <a:ext cx="3931920" cy="5486400"/>
-          </a:xfrm>
-          <a:prstGeom prst="rect">
-            <a:avLst/>
-          </a:prstGeom>
-          <a:noFill/>
-        </p:spPr>
-        <p:txBody>
-          <a:bodyPr wrap="square">
-            <a:spAutoFit/>
-          </a:bodyPr>
-          <a:lstStyle/>
-          <a:p>
-            <a:pPr>
-              <a:spcAft>
-                <a:spcPts val="1200"/>
-              </a:spcAft>
-              <a:defRPr sz="2400" b="1">
-                <a:solidFill>
-                  <a:srgbClr val="4F81BD"/>
-                </a:solidFill>
-              </a:defRPr>
-            </a:pPr>
-            <a:r>
-              <a:t>Revenue Potential</a:t>
-            </a:r>
-          </a:p>
-          <a:p>
-            <a:pPr>
-              <a:spcAft>
-                <a:spcPts val="1000"/>
-              </a:spcAft>
-              <a:defRPr sz="1900">
-                <a:solidFill>
-                  <a:srgbClr val="333333"/>
-                </a:solidFill>
-              </a:defRPr>
-            </a:pPr>
-            <a:r>
-              <a:t>• 50 customers @ €250/month = €150,000/year</a:t>
-            </a:r>
-          </a:p>
-          <a:p>
-            <a:pPr>
-              <a:spcAft>
-                <a:spcPts val="1000"/>
-              </a:spcAft>
-              <a:defRPr sz="1900">
-                <a:solidFill>
-                  <a:srgbClr val="333333"/>
-                </a:solidFill>
-              </a:defRPr>
-            </a:pPr>
-            <a:r>
-              <a:t>• Data licensing: €2K-5K/month = €24K-60K/year</a:t>
-            </a:r>
-          </a:p>
-          <a:p>
-            <a:pPr>
-              <a:spcAft>
-                <a:spcPts val="1000"/>
-              </a:spcAft>
-              <a:defRPr sz="1900">
-                <a:solidFill>
-                  <a:srgbClr val="333333"/>
-                </a:solidFill>
-              </a:defRPr>
-            </a:pPr>
-            <a:r>
-              <a:t>• Consulting: 10 x €10K = €100K/year</a:t>
-            </a:r>
-          </a:p>
-          <a:p>
-            <a:pPr>
-              <a:spcAft>
-                <a:spcPts val="1000"/>
-              </a:spcAft>
-              <a:defRPr sz="1900">
-                <a:solidFill>
-                  <a:srgbClr val="333333"/>
-                </a:solidFill>
-              </a:defRPr>
-            </a:pPr>
-            <a:r>
-              <a:t>• TOTAL: €274K-310K Year 1</a:t>
-            </a:r>
-          </a:p>
-        </p:txBody>
-      </p:sp>
-    </p:spTree>
-  </p:cSld>
-  <p:clrMapOvr>
-    <a:masterClrMapping/>
-  </p:clrMapOvr>
-</p:sld>
-</file>
-
-<file path=ppt/slides/slide7.xml><?xml version="1.0" encoding="utf-8"?>
-<p:sld xmlns:a="http://schemas.openxmlformats.org/drawingml/2006/main" xmlns:p="http://schemas.openxmlformats.org/presentationml/2006/main" xmlns:r="http://schemas.openxmlformats.org/officeDocument/2006/relationships">
-  <p:cSld>
-    <p:bg>
-      <p:bgPr>
-        <a:solidFill>
-          <a:srgbClr val="FFFFFF"/>
-        </a:solidFill>
-        <a:effectLst/>
-      </p:bgPr>
-    </p:bg>
-    <p:spTree>
-      <p:nvGrpSpPr>
-        <p:cNvPr id="1" name=""/>
-        <p:cNvGrpSpPr/>
-        <p:nvPr/>
-      </p:nvGrpSpPr>
-      <p:grpSpPr/>
-      <p:sp>
-        <p:nvSpPr>
-          <p:cNvPr id="2" name="Rectangle 1"/>
-          <p:cNvSpPr/>
-          <p:nvPr/>
-        </p:nvSpPr>
-        <p:spPr>
-          <a:xfrm>
-            <a:off x="0" y="0"/>
-            <a:ext cx="9144000" cy="731520"/>
-          </a:xfrm>
-          <a:prstGeom prst="rect">
-            <a:avLst/>
-          </a:prstGeom>
-          <a:solidFill>
-            <a:srgbClr val="1F4E79"/>
-          </a:solidFill>
-          <a:ln>
-            <a:solidFill>
-              <a:srgbClr val="1F4E79"/>
-            </a:solidFill>
-          </a:ln>
-        </p:spPr>
-        <p:style>
-          <a:lnRef idx="1">
-            <a:schemeClr val="accent1"/>
-          </a:lnRef>
-          <a:fillRef idx="3">
-            <a:schemeClr val="accent1"/>
-          </a:fillRef>
-          <a:effectRef idx="2">
-            <a:schemeClr val="accent1"/>
-          </a:effectRef>
-          <a:fontRef idx="minor">
-            <a:schemeClr val="lt1"/>
-          </a:fontRef>
-        </p:style>
-        <p:txBody>
-          <a:bodyPr rtlCol="0" anchor="ctr"/>
-          <a:lstStyle/>
-          <a:p>
-            <a:pPr algn="ctr">
-              <a:spcBef>
-                <a:spcPts val="1000"/>
-              </a:spcBef>
-              <a:spcAft>
-                <a:spcPts val="1000"/>
-              </a:spcAft>
-              <a:defRPr sz="4800" b="1">
-                <a:solidFill>
-                  <a:srgbClr val="FFFFFF"/>
-                </a:solidFill>
-              </a:defRPr>
-            </a:pPr>
-            <a:r>
-              <a:t>Application #2: Real Estate Valuation</a:t>
-            </a:r>
-          </a:p>
-        </p:txBody>
-      </p:sp>
-      <p:sp>
-        <p:nvSpPr>
-          <p:cNvPr id="3" name="TextBox 2"/>
-          <p:cNvSpPr txBox="1"/>
-          <p:nvPr/>
-        </p:nvSpPr>
-        <p:spPr>
-          <a:xfrm>
-            <a:off x="457200" y="1005840"/>
-            <a:ext cx="3931920" cy="5486400"/>
-          </a:xfrm>
-          <a:prstGeom prst="rect">
-            <a:avLst/>
-          </a:prstGeom>
-          <a:noFill/>
-        </p:spPr>
-        <p:txBody>
-          <a:bodyPr wrap="square">
-            <a:spAutoFit/>
-          </a:bodyPr>
-          <a:lstStyle/>
-          <a:p>
-            <a:pPr>
-              <a:spcAft>
-                <a:spcPts val="1200"/>
-              </a:spcAft>
-              <a:defRPr sz="2400" b="1">
-                <a:solidFill>
-                  <a:srgbClr val="4F81BD"/>
-                </a:solidFill>
-              </a:defRPr>
-            </a:pPr>
-            <a:r>
-              <a:t>What Changes</a:t>
-            </a:r>
-          </a:p>
-          <a:p>
-            <a:pPr>
-              <a:spcAft>
-                <a:spcPts val="1000"/>
-              </a:spcAft>
-              <a:defRPr sz="1900">
-                <a:solidFill>
-                  <a:srgbClr val="333333"/>
-                </a:solidFill>
-              </a:defRPr>
-            </a:pPr>
-            <a:r>
-              <a:t>• OCR extracts: Property prices, location, features, sqft</a:t>
-            </a:r>
-          </a:p>
-          <a:p>
-            <a:pPr>
-              <a:spcAft>
-                <a:spcPts val="1000"/>
-              </a:spcAft>
-              <a:defRPr sz="1900">
-                <a:solidFill>
-                  <a:srgbClr val="333333"/>
-                </a:solidFill>
-              </a:defRPr>
-            </a:pPr>
-            <a:r>
-              <a:t>• Targets: Zillow, Rightmove, Immobilienscout24</a:t>
-            </a:r>
-          </a:p>
-          <a:p>
-            <a:pPr>
-              <a:spcAft>
-                <a:spcPts val="1000"/>
-              </a:spcAft>
-              <a:defRPr sz="1900">
-                <a:solidFill>
-                  <a:srgbClr val="333333"/>
-                </a:solidFill>
-              </a:defRPr>
-            </a:pPr>
-            <a:r>
-              <a:t>• Data points: 20+ property attributes per capture</a:t>
-            </a:r>
-          </a:p>
-          <a:p>
-            <a:pPr>
-              <a:spcAft>
-                <a:spcPts val="1000"/>
-              </a:spcAft>
-              <a:defRPr sz="1900">
-                <a:solidFill>
-                  <a:srgbClr val="333333"/>
-                </a:solidFill>
-              </a:defRPr>
-            </a:pPr>
-            <a:r>
-              <a:t>• Effort: 40% new code (same core platform)</a:t>
-            </a:r>
-          </a:p>
-        </p:txBody>
-      </p:sp>
-      <p:sp>
-        <p:nvSpPr>
-          <p:cNvPr id="4" name="TextBox 3"/>
-          <p:cNvSpPr txBox="1"/>
-          <p:nvPr/>
-        </p:nvSpPr>
-        <p:spPr>
-          <a:xfrm>
-            <a:off x="4754880" y="1005840"/>
-            <a:ext cx="3931920" cy="5486400"/>
-          </a:xfrm>
-          <a:prstGeom prst="rect">
-            <a:avLst/>
-          </a:prstGeom>
-          <a:noFill/>
-        </p:spPr>
-        <p:txBody>
-          <a:bodyPr wrap="square">
-            <a:spAutoFit/>
-          </a:bodyPr>
-          <a:lstStyle/>
-          <a:p>
-            <a:pPr>
-              <a:spcAft>
-                <a:spcPts val="1200"/>
-              </a:spcAft>
-              <a:defRPr sz="2400" b="1">
-                <a:solidFill>
-                  <a:srgbClr val="4F81BD"/>
-                </a:solidFill>
-              </a:defRPr>
-            </a:pPr>
-            <a:r>
-              <a:t>Revenue Potential</a:t>
-            </a:r>
-          </a:p>
-          <a:p>
-            <a:pPr>
-              <a:spcAft>
-                <a:spcPts val="1000"/>
-              </a:spcAft>
-              <a:defRPr sz="1900">
-                <a:solidFill>
-                  <a:srgbClr val="333333"/>
-                </a:solidFill>
-              </a:defRPr>
-            </a:pPr>
-            <a:r>
-              <a:t>• Market 3x larger than retail</a:t>
-            </a:r>
-          </a:p>
-          <a:p>
-            <a:pPr>
-              <a:spcAft>
-                <a:spcPts val="1000"/>
-              </a:spcAft>
-              <a:defRPr sz="1900">
-                <a:solidFill>
-                  <a:srgbClr val="333333"/>
-                </a:solidFill>
-              </a:defRPr>
-            </a:pPr>
-            <a:r>
-              <a:t>• 100 customers @ €400/month = €480K/year</a:t>
-            </a:r>
-          </a:p>
-          <a:p>
-            <a:pPr>
-              <a:spcAft>
-                <a:spcPts val="1000"/>
-              </a:spcAft>
-              <a:defRPr sz="1900">
-                <a:solidFill>
-                  <a:srgbClr val="333333"/>
-                </a:solidFill>
-              </a:defRPr>
-            </a:pPr>
-            <a:r>
-              <a:t>• Valuation reports: €2K-10K per engagement</a:t>
-            </a:r>
-          </a:p>
-          <a:p>
-            <a:pPr>
-              <a:spcAft>
-                <a:spcPts val="1000"/>
-              </a:spcAft>
-              <a:defRPr sz="1900">
-                <a:solidFill>
-                  <a:srgbClr val="333333"/>
-                </a:solidFill>
-              </a:defRPr>
-            </a:pPr>
-            <a:r>
-              <a:t>• TOTAL: €600K-800K Year 1</a:t>
-            </a:r>
-          </a:p>
-        </p:txBody>
-      </p:sp>
-    </p:spTree>
-  </p:cSld>
-  <p:clrMapOvr>
-    <a:masterClrMapping/>
-  </p:clrMapOvr>
-</p:sld>
-</file>
-
-<file path=ppt/slides/slide8.xml><?xml version="1.0" encoding="utf-8"?>
-<p:sld xmlns:a="http://schemas.openxmlformats.org/drawingml/2006/main" xmlns:p="http://schemas.openxmlformats.org/presentationml/2006/main" xmlns:r="http://schemas.openxmlformats.org/officeDocument/2006/relationships">
-  <p:cSld>
-    <p:bg>
-      <p:bgPr>
-        <a:solidFill>
-          <a:srgbClr val="FFFFFF"/>
-        </a:solidFill>
-        <a:effectLst/>
-      </p:bgPr>
-    </p:bg>
-    <p:spTree>
-      <p:nvGrpSpPr>
-        <p:cNvPr id="1" name=""/>
-        <p:cNvGrpSpPr/>
-        <p:nvPr/>
-      </p:nvGrpSpPr>
-      <p:grpSpPr/>
-      <p:sp>
-        <p:nvSpPr>
-          <p:cNvPr id="2" name="Rectangle 1"/>
-          <p:cNvSpPr/>
-          <p:nvPr/>
-        </p:nvSpPr>
-        <p:spPr>
-          <a:xfrm>
-            <a:off x="0" y="0"/>
-            <a:ext cx="9144000" cy="731520"/>
-          </a:xfrm>
-          <a:prstGeom prst="rect">
-            <a:avLst/>
-          </a:prstGeom>
-          <a:solidFill>
-            <a:srgbClr val="1F4E79"/>
-          </a:solidFill>
-          <a:ln>
-            <a:solidFill>
-              <a:srgbClr val="1F4E79"/>
-            </a:solidFill>
-          </a:ln>
-        </p:spPr>
-        <p:style>
-          <a:lnRef idx="1">
-            <a:schemeClr val="accent1"/>
-          </a:lnRef>
-          <a:fillRef idx="3">
-            <a:schemeClr val="accent1"/>
-          </a:fillRef>
-          <a:effectRef idx="2">
-            <a:schemeClr val="accent1"/>
-          </a:effectRef>
-          <a:fontRef idx="minor">
-            <a:schemeClr val="lt1"/>
-          </a:fontRef>
-        </p:style>
-        <p:txBody>
-          <a:bodyPr rtlCol="0" anchor="ctr"/>
-          <a:lstStyle/>
-          <a:p>
-            <a:pPr algn="ctr">
-              <a:spcBef>
-                <a:spcPts val="1000"/>
-              </a:spcBef>
-              <a:spcAft>
-                <a:spcPts val="1000"/>
-              </a:spcAft>
-              <a:defRPr sz="4800" b="1">
-                <a:solidFill>
-                  <a:srgbClr val="FFFFFF"/>
-                </a:solidFill>
-              </a:defRPr>
-            </a:pPr>
-            <a:r>
-              <a:t>Application #3: Vehicle Pricing</a:t>
-            </a:r>
-          </a:p>
-        </p:txBody>
-      </p:sp>
-      <p:sp>
-        <p:nvSpPr>
-          <p:cNvPr id="3" name="TextBox 2"/>
-          <p:cNvSpPr txBox="1"/>
-          <p:nvPr/>
-        </p:nvSpPr>
-        <p:spPr>
-          <a:xfrm>
-            <a:off x="457200" y="1005840"/>
-            <a:ext cx="3931920" cy="5486400"/>
-          </a:xfrm>
-          <a:prstGeom prst="rect">
-            <a:avLst/>
-          </a:prstGeom>
-          <a:noFill/>
-        </p:spPr>
-        <p:txBody>
-          <a:bodyPr wrap="square">
-            <a:spAutoFit/>
-          </a:bodyPr>
-          <a:lstStyle/>
-          <a:p>
-            <a:pPr>
-              <a:spcAft>
-                <a:spcPts val="1200"/>
-              </a:spcAft>
-              <a:defRPr sz="2400" b="1">
-                <a:solidFill>
-                  <a:srgbClr val="4F81BD"/>
-                </a:solidFill>
-              </a:defRPr>
-            </a:pPr>
-            <a:r>
-              <a:t>What Changes</a:t>
-            </a:r>
-          </a:p>
-          <a:p>
-            <a:pPr>
-              <a:spcAft>
-                <a:spcPts val="1000"/>
-              </a:spcAft>
-              <a:defRPr sz="1900">
-                <a:solidFill>
-                  <a:srgbClr val="333333"/>
-                </a:solidFill>
-              </a:defRPr>
-            </a:pPr>
-            <a:r>
-              <a:t>• OCR extracts: VIN, mileage, price, condition, specs</a:t>
-            </a:r>
-          </a:p>
-          <a:p>
-            <a:pPr>
-              <a:spcAft>
-                <a:spcPts val="1000"/>
-              </a:spcAft>
-              <a:defRPr sz="1900">
-                <a:solidFill>
-                  <a:srgbClr val="333333"/>
-                </a:solidFill>
-              </a:defRPr>
-            </a:pPr>
-            <a:r>
-              <a:t>• Targets: Autotrader, Cars.com, Edmunds, dealers</a:t>
-            </a:r>
-          </a:p>
-          <a:p>
-            <a:pPr>
-              <a:spcAft>
-                <a:spcPts val="1000"/>
-              </a:spcAft>
-              <a:defRPr sz="1900">
-                <a:solidFill>
-                  <a:srgbClr val="333333"/>
-                </a:solidFill>
-              </a:defRPr>
-            </a:pPr>
-            <a:r>
-              <a:t>• Data points: 30+ vehicle attributes per capture</a:t>
-            </a:r>
-          </a:p>
-          <a:p>
-            <a:pPr>
-              <a:spcAft>
-                <a:spcPts val="1000"/>
-              </a:spcAft>
-              <a:defRPr sz="1900">
-                <a:solidFill>
-                  <a:srgbClr val="333333"/>
-                </a:solidFill>
-              </a:defRPr>
-            </a:pPr>
-            <a:r>
-              <a:t>• Effort: 35% new code (inventory tracking module)</a:t>
-            </a:r>
-          </a:p>
-        </p:txBody>
-      </p:sp>
-      <p:sp>
-        <p:nvSpPr>
-          <p:cNvPr id="4" name="TextBox 3"/>
-          <p:cNvSpPr txBox="1"/>
-          <p:nvPr/>
-        </p:nvSpPr>
-        <p:spPr>
-          <a:xfrm>
-            <a:off x="4754880" y="1005840"/>
-            <a:ext cx="3931920" cy="5486400"/>
-          </a:xfrm>
-          <a:prstGeom prst="rect">
-            <a:avLst/>
-          </a:prstGeom>
-          <a:noFill/>
-        </p:spPr>
-        <p:txBody>
-          <a:bodyPr wrap="square">
-            <a:spAutoFit/>
-          </a:bodyPr>
-          <a:lstStyle/>
-          <a:p>
-            <a:pPr>
-              <a:spcAft>
-                <a:spcPts val="1200"/>
-              </a:spcAft>
-              <a:defRPr sz="2400" b="1">
-                <a:solidFill>
-                  <a:srgbClr val="4F81BD"/>
-                </a:solidFill>
-              </a:defRPr>
-            </a:pPr>
-            <a:r>
-              <a:t>Revenue Potential</a:t>
-            </a:r>
-          </a:p>
-          <a:p>
-            <a:pPr>
-              <a:spcAft>
-                <a:spcPts val="1000"/>
-              </a:spcAft>
-              <a:defRPr sz="1900">
-                <a:solidFill>
-                  <a:srgbClr val="333333"/>
-                </a:solidFill>
-              </a:defRPr>
-            </a:pPr>
-            <a:r>
-              <a:t>• Used car market: €150B+ annually in EU</a:t>
-            </a:r>
-          </a:p>
-          <a:p>
-            <a:pPr>
-              <a:spcAft>
-                <a:spcPts val="1000"/>
-              </a:spcAft>
-              <a:defRPr sz="1900">
-                <a:solidFill>
-                  <a:srgbClr val="333333"/>
-                </a:solidFill>
-              </a:defRPr>
-            </a:pPr>
-            <a:r>
-              <a:t>• 120 customers @ €350/month = €504K/year</a:t>
-            </a:r>
-          </a:p>
-          <a:p>
-            <a:pPr>
-              <a:spcAft>
-                <a:spcPts val="1000"/>
-              </a:spcAft>
-              <a:defRPr sz="1900">
-                <a:solidFill>
-                  <a:srgbClr val="333333"/>
-                </a:solidFill>
-              </a:defRPr>
-            </a:pPr>
-            <a:r>
-              <a:t>• Market reports: €5K-50K per deal</a:t>
-            </a:r>
-          </a:p>
-          <a:p>
-            <a:pPr>
-              <a:spcAft>
-                <a:spcPts val="1000"/>
-              </a:spcAft>
-              <a:defRPr sz="1900">
-                <a:solidFill>
-                  <a:srgbClr val="333333"/>
-                </a:solidFill>
-              </a:defRPr>
-            </a:pPr>
-            <a:r>
-              <a:t>• TOTAL: €650K-1M Year 1</a:t>
-            </a:r>
-          </a:p>
-        </p:txBody>
-      </p:sp>
-    </p:spTree>
-  </p:cSld>
-  <p:clrMapOvr>
-    <a:masterClrMapping/>
-  </p:clrMapOvr>
-</p:sld>
-</file>
-
-<file path=ppt/slides/slide9.xml><?xml version="1.0" encoding="utf-8"?>
-<p:sld xmlns:a="http://schemas.openxmlformats.org/drawingml/2006/main" xmlns:p="http://schemas.openxmlformats.org/presentationml/2006/main" xmlns:r="http://schemas.openxmlformats.org/officeDocument/2006/relationships">
-  <p:cSld>
-    <p:bg>
-      <p:bgPr>
-        <a:solidFill>
-          <a:srgbClr val="FFFFFF"/>
-        </a:solidFill>
-        <a:effectLst/>
-      </p:bgPr>
-    </p:bg>
-    <p:spTree>
-      <p:nvGrpSpPr>
-        <p:cNvPr id="1" name=""/>
-        <p:cNvGrpSpPr/>
-        <p:nvPr/>
-      </p:nvGrpSpPr>
-      <p:grpSpPr/>
-      <p:sp>
-        <p:nvSpPr>
-          <p:cNvPr id="2" name="Rectangle 1"/>
-          <p:cNvSpPr/>
-          <p:nvPr/>
-        </p:nvSpPr>
-        <p:spPr>
-          <a:xfrm>
-            <a:off x="0" y="0"/>
-            <a:ext cx="9144000" cy="731520"/>
-          </a:xfrm>
-          <a:prstGeom prst="rect">
-            <a:avLst/>
-          </a:prstGeom>
-          <a:solidFill>
-            <a:srgbClr val="1F4E79"/>
-          </a:solidFill>
-          <a:ln>
-            <a:solidFill>
-              <a:srgbClr val="1F4E79"/>
-            </a:solidFill>
-          </a:ln>
-        </p:spPr>
-        <p:style>
-          <a:lnRef idx="1">
-            <a:schemeClr val="accent1"/>
-          </a:lnRef>
-          <a:fillRef idx="3">
-            <a:schemeClr val="accent1"/>
-          </a:fillRef>
-          <a:effectRef idx="2">
-            <a:schemeClr val="accent1"/>
-          </a:effectRef>
-          <a:fontRef idx="minor">
-            <a:schemeClr val="lt1"/>
-          </a:fontRef>
-        </p:style>
-        <p:txBody>
-          <a:bodyPr rtlCol="0" anchor="ctr"/>
-          <a:lstStyle/>
-          <a:p>
-            <a:pPr algn="ctr">
-              <a:spcBef>
-                <a:spcPts val="1000"/>
-              </a:spcBef>
-              <a:spcAft>
-                <a:spcPts val="1000"/>
-              </a:spcAft>
-              <a:defRPr sz="4800" b="1">
-                <a:solidFill>
-                  <a:srgbClr val="FFFFFF"/>
-                </a:solidFill>
-              </a:defRPr>
-            </a:pPr>
-            <a:r>
-              <a:t>Application #4: Hotel Rate Monitoring</a:t>
-            </a:r>
-          </a:p>
-        </p:txBody>
-      </p:sp>
-      <p:sp>
-        <p:nvSpPr>
-          <p:cNvPr id="3" name="TextBox 2"/>
-          <p:cNvSpPr txBox="1"/>
-          <p:nvPr/>
-        </p:nvSpPr>
-        <p:spPr>
-          <a:xfrm>
-            <a:off x="457200" y="1005840"/>
-            <a:ext cx="3931920" cy="5486400"/>
-          </a:xfrm>
-          <a:prstGeom prst="rect">
-            <a:avLst/>
-          </a:prstGeom>
-          <a:noFill/>
-        </p:spPr>
-        <p:txBody>
-          <a:bodyPr wrap="square">
-            <a:spAutoFit/>
-          </a:bodyPr>
-          <a:lstStyle/>
-          <a:p>
-            <a:pPr>
-              <a:spcAft>
-                <a:spcPts val="1200"/>
-              </a:spcAft>
-              <a:defRPr sz="2400" b="1">
-                <a:solidFill>
-                  <a:srgbClr val="4F81BD"/>
-                </a:solidFill>
-              </a:defRPr>
-            </a:pPr>
-            <a:r>
-              <a:t>What Changes</a:t>
-            </a:r>
-          </a:p>
-          <a:p>
-            <a:pPr>
-              <a:spcAft>
-                <a:spcPts val="1000"/>
-              </a:spcAft>
-              <a:defRPr sz="1900">
-                <a:solidFill>
-                  <a:srgbClr val="333333"/>
-                </a:solidFill>
-              </a:defRPr>
-            </a:pPr>
-            <a:r>
-              <a:t>• OCR extracts: Room type, nightly rate, occupancy</a:t>
-            </a:r>
-          </a:p>
-          <a:p>
-            <a:pPr>
-              <a:spcAft>
-                <a:spcPts val="1000"/>
-              </a:spcAft>
-              <a:defRPr sz="1900">
-                <a:solidFill>
-                  <a:srgbClr val="333333"/>
-                </a:solidFill>
-              </a:defRPr>
-            </a:pPr>
-            <a:r>
-              <a:t>• Targets: Booking.com, Hotels.com, Expedia</a:t>
-            </a:r>
-          </a:p>
-          <a:p>
-            <a:pPr>
-              <a:spcAft>
-                <a:spcPts val="1000"/>
-              </a:spcAft>
-              <a:defRPr sz="1900">
-                <a:solidFill>
-                  <a:srgbClr val="333333"/>
-                </a:solidFill>
-              </a:defRPr>
-            </a:pPr>
-            <a:r>
-              <a:t>• Data points: 20+ hotel attributes per capture</a:t>
-            </a:r>
-          </a:p>
-          <a:p>
-            <a:pPr>
-              <a:spcAft>
-                <a:spcPts val="1000"/>
-              </a:spcAft>
-              <a:defRPr sz="1900">
-                <a:solidFill>
-                  <a:srgbClr val="333333"/>
-                </a:solidFill>
-              </a:defRPr>
-            </a:pPr>
-            <a:r>
-              <a:t>• Effort: 40% new code (calendar tracking)</a:t>
-            </a:r>
-          </a:p>
-        </p:txBody>
-      </p:sp>
-      <p:sp>
-        <p:nvSpPr>
-          <p:cNvPr id="4" name="TextBox 3"/>
-          <p:cNvSpPr txBox="1"/>
-          <p:nvPr/>
-        </p:nvSpPr>
-        <p:spPr>
-          <a:xfrm>
-            <a:off x="4754880" y="1005840"/>
-            <a:ext cx="3931920" cy="5486400"/>
-          </a:xfrm>
-          <a:prstGeom prst="rect">
-            <a:avLst/>
-          </a:prstGeom>
-          <a:noFill/>
-        </p:spPr>
-        <p:txBody>
-          <a:bodyPr wrap="square">
-            <a:spAutoFit/>
-          </a:bodyPr>
-          <a:lstStyle/>
-          <a:p>
-            <a:pPr>
-              <a:spcAft>
-                <a:spcPts val="1200"/>
-              </a:spcAft>
-              <a:defRPr sz="2400" b="1">
-                <a:solidFill>
-                  <a:srgbClr val="4F81BD"/>
-                </a:solidFill>
-              </a:defRPr>
-            </a:pPr>
-            <a:r>
-              <a:t>Revenue Potential</a:t>
-            </a:r>
-          </a:p>
-          <a:p>
-            <a:pPr>
-              <a:spcAft>
-                <a:spcPts val="1000"/>
-              </a:spcAft>
-              <a:defRPr sz="1900">
-                <a:solidFill>
-                  <a:srgbClr val="333333"/>
-                </a:solidFill>
-              </a:defRPr>
-            </a:pPr>
-            <a:r>
-              <a:t>• Hospitality market highly price-sensitive</a:t>
-            </a:r>
-          </a:p>
-          <a:p>
-            <a:pPr>
-              <a:spcAft>
-                <a:spcPts val="1000"/>
-              </a:spcAft>
-              <a:defRPr sz="1900">
-                <a:solidFill>
-                  <a:srgbClr val="333333"/>
-                </a:solidFill>
-              </a:defRPr>
-            </a:pPr>
-            <a:r>
-              <a:t>• 80 customers @ €300/month = €288K/year</a:t>
-            </a:r>
-          </a:p>
-          <a:p>
-            <a:pPr>
-              <a:spcAft>
-                <a:spcPts val="1000"/>
-              </a:spcAft>
-              <a:defRPr sz="1900">
-                <a:solidFill>
-                  <a:srgbClr val="333333"/>
-                </a:solidFill>
-              </a:defRPr>
-            </a:pPr>
-            <a:r>
-              <a:t>• Revenue optimization: €10K-100K per chain</a:t>
-            </a:r>
-          </a:p>
-          <a:p>
-            <a:pPr>
-              <a:spcAft>
-                <a:spcPts val="1000"/>
-              </a:spcAft>
-              <a:defRPr sz="1900">
-                <a:solidFill>
-                  <a:srgbClr val="333333"/>
-                </a:solidFill>
-              </a:defRPr>
-            </a:pPr>
-            <a:r>
-              <a:t>• TOTAL: €450K-700K Year 1</a:t>
+              <a:rPr dirty="0"/>
+              <a:t>Repeatable: Works week after week with zero maintenance</a:t>
             </a:r>
           </a:p>
         </p:txBody>
